--- a/10 класс/urok2/Практика_Python_задачи_по_баллам.pptx
+++ b/10 класс/urok2/Практика_Python_задачи_по_баллам.pptx
@@ -4,6 +4,9 @@
   <p:sldMasterIdLst>
     <p:sldMasterId id="2147483648" r:id="rId1"/>
   </p:sldMasterIdLst>
+  <p:notesMasterIdLst>
+    <p:notesMasterId r:id="rId13"/>
+  </p:notesMasterIdLst>
   <p:sldIdLst>
     <p:sldId id="256" r:id="rId2"/>
     <p:sldId id="257" r:id="rId3"/>
@@ -17,9 +20,6 @@
     <p:sldId id="265" r:id="rId11"/>
     <p:sldId id="266" r:id="rId12"/>
   </p:sldIdLst>
-  <p:notesMasterIdLst>
-    <p:notesMasterId r:id="rId13"/>
-  </p:notesMasterIdLst>
   <p:sldSz cx="12192000" cy="6858000"/>
   <p:notesSz cx="6858000" cy="12192000"/>
   <p:defaultTextStyle>
@@ -114,6 +114,11 @@
       </a:defRPr>
     </a:lvl9pPr>
   </p:defaultTextStyle>
+  <p:extLst>
+    <p:ext uri="{EFAFB233-063F-42B5-8137-9DF3F51BA10A}">
+      <p15:sldGuideLst xmlns:p15="http://schemas.microsoft.com/office/powerpoint/2012/main"/>
+    </p:ext>
+  </p:extLst>
 </p:presentation>
 </file>
 
@@ -139,234 +144,10 @@
           <a:chExt cx="0" cy="0"/>
         </a:xfrm>
       </p:grpSpPr>
-      <p:sp>
-        <p:nvSpPr>
-          <p:cNvPr id="2" name="Header Placeholder 1"/>
-          <p:cNvSpPr>
-            <a:spLocks noGrp="1"/>
-          </p:cNvSpPr>
-          <p:nvPr>
-            <p:ph type="hdr" sz="quarter"/>
-          </p:nvPr>
-        </p:nvSpPr>
-        <p:spPr>
-          <a:xfrm>
-            <a:off x="0" y="0"/>
-            <a:ext cx="2971800" cy="458788"/>
-          </a:xfrm>
-          <a:prstGeom prst="rect">
-            <a:avLst/>
-          </a:prstGeom>
-        </p:spPr>
-        <p:txBody>
-          <a:bodyPr vert="horz" lIns="91440" tIns="45720" rIns="91440" bIns="45720" rtlCol="0"/>
-          <a:lstStyle>
-            <a:lvl1pPr algn="l">
-              <a:defRPr sz="1200"/>
-            </a:lvl1pPr>
-          </a:lstStyle>
-          <a:p>
-            <a:endParaRPr lang="en-US"/>
-          </a:p>
-        </p:txBody>
-      </p:sp>
-      <p:sp>
-        <p:nvSpPr>
-          <p:cNvPr id="3" name="Date Placeholder 2"/>
-          <p:cNvSpPr>
-            <a:spLocks noGrp="1"/>
-          </p:cNvSpPr>
-          <p:nvPr>
-            <p:ph type="dt" idx="1"/>
-          </p:nvPr>
-        </p:nvSpPr>
-        <p:spPr>
-          <a:xfrm>
-            <a:off x="3884613" y="0"/>
-            <a:ext cx="2971800" cy="458788"/>
-          </a:xfrm>
-          <a:prstGeom prst="rect">
-            <a:avLst/>
-          </a:prstGeom>
-        </p:spPr>
-        <p:txBody>
-          <a:bodyPr vert="horz" lIns="91440" tIns="45720" rIns="91440" bIns="45720" rtlCol="0"/>
-          <a:lstStyle>
-            <a:lvl1pPr algn="r">
-              <a:defRPr sz="1200"/>
-            </a:lvl1pPr>
-          </a:lstStyle>
-          <a:p>
-            <a:fld id="{5282F153-3F37-0F45-9E97-73ACFA13230C}" type="datetimeFigureOut">
-              <a:rPr lang="en-US"/>
-              <a:t>7/23/19</a:t>
-            </a:fld>
-            <a:endParaRPr lang="en-US"/>
-          </a:p>
-        </p:txBody>
-      </p:sp>
-      <p:sp>
-        <p:nvSpPr>
-          <p:cNvPr id="4" name="Slide Image Placeholder 3"/>
-          <p:cNvSpPr>
-            <a:spLocks noGrp="1" noRot="1" noChangeAspect="1"/>
-          </p:cNvSpPr>
-          <p:nvPr>
-            <p:ph type="sldImg" idx="2"/>
-          </p:nvPr>
-        </p:nvSpPr>
-        <p:spPr>
-          <a:xfrm>
-            <a:off x="685800" y="1143000"/>
-            <a:ext cx="5486400" cy="3086100"/>
-          </a:xfrm>
-          <a:prstGeom prst="rect">
-            <a:avLst/>
-          </a:prstGeom>
-          <a:noFill/>
-          <a:ln w="12700">
-            <a:solidFill>
-              <a:prstClr val="black"/>
-            </a:solidFill>
-          </a:ln>
-        </p:spPr>
-        <p:txBody>
-          <a:bodyPr vert="horz" lIns="91440" tIns="45720" rIns="91440" bIns="45720" rtlCol="0" anchor="ctr"/>
-          <a:lstStyle/>
-          <a:p>
-            <a:endParaRPr lang="en-US"/>
-          </a:p>
-        </p:txBody>
-      </p:sp>
-      <p:sp>
-        <p:nvSpPr>
-          <p:cNvPr id="5" name="Notes Placeholder 4"/>
-          <p:cNvSpPr>
-            <a:spLocks noGrp="1"/>
-          </p:cNvSpPr>
-          <p:nvPr>
-            <p:ph type="body" sz="quarter" idx="3"/>
-          </p:nvPr>
-        </p:nvSpPr>
-        <p:spPr>
-          <a:xfrm>
-            <a:off x="685800" y="4400550"/>
-            <a:ext cx="5486400" cy="3600450"/>
-          </a:xfrm>
-          <a:prstGeom prst="rect">
-            <a:avLst/>
-          </a:prstGeom>
-        </p:spPr>
-        <p:txBody>
-          <a:bodyPr vert="horz" lIns="91440" tIns="45720" rIns="91440" bIns="45720" rtlCol="0"/>
-          <a:lstStyle/>
-          <a:p>
-            <a:pPr lvl="0"/>
-            <a:r>
-              <a:rPr lang="en-US"/>
-              <a:t>Click to edit Master text styles</a:t>
-            </a:r>
-          </a:p>
-          <a:p>
-            <a:pPr lvl="1"/>
-            <a:r>
-              <a:rPr lang="en-US"/>
-              <a:t>Second level</a:t>
-            </a:r>
-          </a:p>
-          <a:p>
-            <a:pPr lvl="2"/>
-            <a:r>
-              <a:rPr lang="en-US"/>
-              <a:t>Third level</a:t>
-            </a:r>
-          </a:p>
-          <a:p>
-            <a:pPr lvl="3"/>
-            <a:r>
-              <a:rPr lang="en-US"/>
-              <a:t>Fourth level</a:t>
-            </a:r>
-          </a:p>
-          <a:p>
-            <a:pPr lvl="4"/>
-            <a:r>
-              <a:rPr lang="en-US"/>
-              <a:t>Fifth level</a:t>
-            </a:r>
-          </a:p>
-        </p:txBody>
-      </p:sp>
-      <p:sp>
-        <p:nvSpPr>
-          <p:cNvPr id="6" name="Footer Placeholder 5"/>
-          <p:cNvSpPr>
-            <a:spLocks noGrp="1"/>
-          </p:cNvSpPr>
-          <p:nvPr>
-            <p:ph type="ftr" sz="quarter" idx="4"/>
-          </p:nvPr>
-        </p:nvSpPr>
-        <p:spPr>
-          <a:xfrm>
-            <a:off x="0" y="8685213"/>
-            <a:ext cx="2971800" cy="458787"/>
-          </a:xfrm>
-          <a:prstGeom prst="rect">
-            <a:avLst/>
-          </a:prstGeom>
-        </p:spPr>
-        <p:txBody>
-          <a:bodyPr vert="horz" lIns="91440" tIns="45720" rIns="91440" bIns="45720" rtlCol="0" anchor="b"/>
-          <a:lstStyle>
-            <a:lvl1pPr algn="l">
-              <a:defRPr sz="1200"/>
-            </a:lvl1pPr>
-          </a:lstStyle>
-          <a:p>
-            <a:endParaRPr lang="en-US"/>
-          </a:p>
-        </p:txBody>
-      </p:sp>
-      <p:sp>
-        <p:nvSpPr>
-          <p:cNvPr id="7" name="Slide Number Placeholder 6"/>
-          <p:cNvSpPr>
-            <a:spLocks noGrp="1"/>
-          </p:cNvSpPr>
-          <p:nvPr>
-            <p:ph type="sldNum" sz="quarter" idx="5"/>
-          </p:nvPr>
-        </p:nvSpPr>
-        <p:spPr>
-          <a:xfrm>
-            <a:off x="3884613" y="8685213"/>
-            <a:ext cx="2971800" cy="458787"/>
-          </a:xfrm>
-          <a:prstGeom prst="rect">
-            <a:avLst/>
-          </a:prstGeom>
-        </p:spPr>
-        <p:txBody>
-          <a:bodyPr vert="horz" lIns="91440" tIns="45720" rIns="91440" bIns="45720" rtlCol="0" anchor="b"/>
-          <a:lstStyle>
-            <a:lvl1pPr algn="r">
-              <a:defRPr sz="1200"/>
-            </a:lvl1pPr>
-          </a:lstStyle>
-          <a:p>
-            <a:fld id="{CE5E9CC1-C706-0F49-92D6-E571CC5EEA8F}" type="slidenum">
-              <a:rPr lang="en-US"/>
-              <a:t>‹#›</a:t>
-            </a:fld>
-            <a:endParaRPr lang="en-US"/>
-          </a:p>
-        </p:txBody>
-      </p:sp>
     </p:spTree>
     <p:extLst>
       <p:ext uri="{BB962C8B-B14F-4D97-AF65-F5344CB8AC3E}">
-        <p14:creationId xmlns:p14="http://schemas.microsoft.com/office/powerpoint/2010/main" val="1024086991"/>
+        <p14:creationId xmlns:p14="http://schemas.microsoft.com/office/powerpoint/2010/main" val="2280917578"/>
       </p:ext>
     </p:extLst>
   </p:cSld>
@@ -514,7 +295,6 @@
               <a:rPr lang="en-US" dirty="0"/>
               <a:t>Раздать листы задач. Объяснить правило: балл задачи равен отметке. Решил на 7 — получил 7.</a:t>
             </a:r>
-            <a:endParaRPr lang="en-US" dirty="0"/>
           </a:p>
         </p:txBody>
       </p:sp>
@@ -602,7 +382,6 @@
               <a:rPr lang="en-US" dirty="0"/>
               <a:t>Внимание: в слове dlina вторая буква — строчная латинская L, не единица.</a:t>
             </a:r>
-            <a:endParaRPr lang="en-US" dirty="0"/>
           </a:p>
         </p:txBody>
       </p:sp>
@@ -690,7 +469,6 @@
               <a:rPr lang="en-US" dirty="0"/>
               <a:t>Задачи на 10 баллов — добровольные. Кто решил, разбирает у доски для всего класса.</a:t>
             </a:r>
-            <a:endParaRPr lang="en-US" dirty="0"/>
           </a:p>
         </p:txBody>
       </p:sp>
@@ -778,7 +556,6 @@
               <a:rPr lang="en-US" dirty="0"/>
               <a:t>Подчеркнуть: не число решённых задач, а уровень. Решил одну на 9 — получил 9.</a:t>
             </a:r>
-            <a:endParaRPr lang="en-US" dirty="0"/>
           </a:p>
         </p:txBody>
       </p:sp>
@@ -866,7 +643,6 @@
               <a:rPr lang="en-US" dirty="0"/>
               <a:t>Задача 1: три print. Задача 2: print("Имя:", imya) и так далее. Частая ошибка — переменная взята в кавычки.</a:t>
             </a:r>
-            <a:endParaRPr lang="en-US" dirty="0"/>
           </a:p>
         </p:txBody>
       </p:sp>
@@ -954,7 +730,6 @@
               <a:rPr lang="en-US" dirty="0"/>
               <a:t>Ответы: 20 и 24; 60. Требовать осмысленные имена переменных, не a и b.</a:t>
             </a:r>
-            <a:endParaRPr lang="en-US" dirty="0"/>
           </a:p>
         </p:txBody>
       </p:sp>
@@ -1042,7 +817,6 @@
               <a:rPr lang="en-US" dirty="0"/>
               <a:t>Ответы: 1 час 40 минут; 4 и 7. Здесь впервые становится ясно, зачем нужны два вида деления.</a:t>
             </a:r>
-            <a:endParaRPr lang="en-US" dirty="0"/>
           </a:p>
         </p:txBody>
       </p:sp>
@@ -1130,7 +904,6 @@
               <a:rPr lang="en-US" dirty="0"/>
               <a:t>Ответы: 16; 1 ч 2 мин 5 с. Задача 8 — самая частая ошибка: берут sek // 60 вместо sek % 3600 // 60.</a:t>
             </a:r>
-            <a:endParaRPr lang="en-US" dirty="0"/>
           </a:p>
         </p:txBody>
       </p:sp>
@@ -1218,7 +991,6 @@
               <a:rPr lang="en-US" dirty="0"/>
               <a:t>Задача 9: a = a + b; b = a - b; a = a - b. Задача 10: (n%10)*100 + (n//10%10)*10 + n//100 = 583.</a:t>
             </a:r>
-            <a:endParaRPr lang="en-US" dirty="0"/>
           </a:p>
         </p:txBody>
       </p:sp>
@@ -1306,7 +1078,6 @@
               <a:rPr lang="en-US" dirty="0"/>
               <a:t>Задача 11: (a + b + abs(a - b)) // 2 = 23. Приём: сумма плюс модуль разности, делённые пополам. Задача 12: последняя*1000 + (n//10%100)*10 + первая = 4231. Кто решил хотя бы одну — получает 10.</a:t>
             </a:r>
-            <a:endParaRPr lang="en-US" dirty="0"/>
           </a:p>
         </p:txBody>
       </p:sp>
@@ -1394,7 +1165,6 @@
               <a:rPr lang="en-US" dirty="0"/>
               <a:t>Шпаргалку можно распечатать и раздать отдельно.</a:t>
             </a:r>
-            <a:endParaRPr lang="en-US" dirty="0"/>
           </a:p>
         </p:txBody>
       </p:sp>
@@ -1467,6 +1237,11 @@
 <file path=ppt/slideMasters/slideMaster1.xml><?xml version="1.0" encoding="utf-8"?>
 <p:sldMaster xmlns:a="http://schemas.openxmlformats.org/drawingml/2006/main" xmlns:r="http://schemas.openxmlformats.org/officeDocument/2006/relationships" xmlns:p="http://schemas.openxmlformats.org/presentationml/2006/main">
   <p:cSld>
+    <p:bg>
+      <p:bgRef idx="1001">
+        <a:schemeClr val="bg1"/>
+      </p:bgRef>
+    </p:bg>
     <p:spTree>
       <p:nvGrpSpPr>
         <p:cNvPr id="1" name=""/>
@@ -1749,6 +1524,7 @@
         <a:solidFill>
           <a:srgbClr val="17132E"/>
         </a:solidFill>
+        <a:effectLst/>
       </p:bgPr>
     </p:bg>
     <p:spTree>
@@ -1830,11 +1606,11 @@
           <a:bodyPr wrap="square" lIns="0" tIns="0" rIns="0" bIns="0" rtlCol="0" anchor="ctr"/>
           <a:lstStyle/>
           <a:p>
-            <a:pPr indent="0" marL="0">
-              <a:buNone/>
-            </a:pPr>
-            <a:r>
-              <a:rPr lang="en-US" sz="1500" b="1" spc="300" kern="0" dirty="0">
+            <a:pPr marL="0" indent="0">
+              <a:buNone/>
+            </a:pPr>
+            <a:r>
+              <a:rPr lang="en-US" sz="1500" b="1" kern="0" spc="300" dirty="0">
                 <a:solidFill>
                   <a:srgbClr val="4FD1E0"/>
                 </a:solidFill>
@@ -1869,7 +1645,7 @@
           <a:bodyPr wrap="square" lIns="0" tIns="0" rIns="0" bIns="0" rtlCol="0" anchor="ctr"/>
           <a:lstStyle/>
           <a:p>
-            <a:pPr indent="0" marL="0">
+            <a:pPr marL="0" indent="0">
               <a:buNone/>
             </a:pPr>
             <a:r>
@@ -1908,7 +1684,7 @@
           <a:bodyPr wrap="square" lIns="0" tIns="0" rIns="0" bIns="0" rtlCol="0" anchor="ctr"/>
           <a:lstStyle/>
           <a:p>
-            <a:pPr indent="0" marL="0">
+            <a:pPr marL="0" indent="0">
               <a:buNone/>
             </a:pPr>
             <a:r>
@@ -1947,7 +1723,7 @@
           <a:bodyPr wrap="square" lIns="0" tIns="0" rIns="0" bIns="0" rtlCol="0" anchor="ctr"/>
           <a:lstStyle/>
           <a:p>
-            <a:pPr indent="0" marL="0">
+            <a:pPr marL="0" indent="0">
               <a:buNone/>
             </a:pPr>
             <a:r>
@@ -1986,7 +1762,7 @@
           <a:bodyPr wrap="square" lIns="0" tIns="0" rIns="0" bIns="0" rtlCol="0" anchor="ctr"/>
           <a:lstStyle/>
           <a:p>
-            <a:pPr indent="0" marL="0">
+            <a:pPr marL="0" indent="0">
               <a:buNone/>
             </a:pPr>
             <a:r>
@@ -2020,6 +1796,7 @@
         <a:solidFill>
           <a:srgbClr val="17132E"/>
         </a:solidFill>
+        <a:effectLst/>
       </p:bgPr>
     </p:bg>
     <p:spTree>
@@ -2057,7 +1834,7 @@
           <a:bodyPr wrap="square" lIns="0" tIns="0" rIns="0" bIns="0" rtlCol="0" anchor="ctr"/>
           <a:lstStyle/>
           <a:p>
-            <a:pPr indent="0" marL="0">
+            <a:pPr marL="0" indent="0">
               <a:buNone/>
             </a:pPr>
             <a:r>
@@ -2096,7 +1873,7 @@
           <a:bodyPr wrap="square" lIns="0" tIns="0" rIns="0" bIns="0" rtlCol="0" anchor="ctr"/>
           <a:lstStyle/>
           <a:p>
-            <a:pPr indent="0" marL="0">
+            <a:pPr marL="0" indent="0">
               <a:buNone/>
             </a:pPr>
             <a:r>
@@ -2135,7 +1912,7 @@
           <a:bodyPr wrap="square" lIns="0" tIns="0" rIns="0" bIns="0" rtlCol="0" anchor="ctr"/>
           <a:lstStyle/>
           <a:p>
-            <a:pPr indent="0" marL="0">
+            <a:pPr marL="0" indent="0">
               <a:buNone/>
             </a:pPr>
             <a:r>
@@ -2201,7 +1978,7 @@
           <a:bodyPr wrap="square" lIns="0" tIns="0" rIns="0" bIns="0" rtlCol="0" anchor="ctr"/>
           <a:lstStyle/>
           <a:p>
-            <a:pPr indent="0" marL="0">
+            <a:pPr marL="0" indent="0">
               <a:lnSpc>
                 <a:spcPct val="110000"/>
               </a:lnSpc>
@@ -2221,7 +1998,7 @@
             <a:endParaRPr lang="en-US" sz="1400" dirty="0"/>
           </a:p>
           <a:p>
-            <a:pPr indent="0" marL="0">
+            <a:pPr marL="0" indent="0">
               <a:lnSpc>
                 <a:spcPct val="110000"/>
               </a:lnSpc>
@@ -2230,7 +2007,7 @@
             <a:endParaRPr lang="en-US" sz="1400" dirty="0"/>
           </a:p>
           <a:p>
-            <a:pPr indent="0" marL="0">
+            <a:pPr marL="0" indent="0">
               <a:lnSpc>
                 <a:spcPct val="110000"/>
               </a:lnSpc>
@@ -2250,7 +2027,7 @@
             <a:endParaRPr lang="en-US" sz="1400" dirty="0"/>
           </a:p>
           <a:p>
-            <a:pPr indent="0" marL="0">
+            <a:pPr marL="0" indent="0">
               <a:lnSpc>
                 <a:spcPct val="110000"/>
               </a:lnSpc>
@@ -2270,7 +2047,7 @@
             <a:endParaRPr lang="en-US" sz="1400" dirty="0"/>
           </a:p>
           <a:p>
-            <a:pPr indent="0" marL="0">
+            <a:pPr marL="0" indent="0">
               <a:lnSpc>
                 <a:spcPct val="110000"/>
               </a:lnSpc>
@@ -2312,7 +2089,7 @@
           <a:bodyPr wrap="square" lIns="0" tIns="0" rIns="0" bIns="0" rtlCol="0" anchor="ctr"/>
           <a:lstStyle/>
           <a:p>
-            <a:pPr indent="0" marL="0">
+            <a:pPr marL="0" indent="0">
               <a:buNone/>
             </a:pPr>
             <a:r>
@@ -2378,7 +2155,7 @@
           <a:bodyPr wrap="square" lIns="0" tIns="0" rIns="0" bIns="0" rtlCol="0" anchor="ctr"/>
           <a:lstStyle/>
           <a:p>
-            <a:pPr indent="0" marL="0">
+            <a:pPr marL="0" indent="0">
               <a:lnSpc>
                 <a:spcPct val="110000"/>
               </a:lnSpc>
@@ -2398,7 +2175,7 @@
             <a:endParaRPr lang="en-US" sz="1300" dirty="0"/>
           </a:p>
           <a:p>
-            <a:pPr indent="0" marL="0">
+            <a:pPr marL="0" indent="0">
               <a:lnSpc>
                 <a:spcPct val="110000"/>
               </a:lnSpc>
@@ -2440,7 +2217,7 @@
           <a:bodyPr wrap="square" lIns="0" tIns="0" rIns="0" bIns="0" rtlCol="0" anchor="ctr"/>
           <a:lstStyle/>
           <a:p>
-            <a:pPr indent="0" marL="0">
+            <a:pPr marL="0" indent="0">
               <a:buNone/>
             </a:pPr>
             <a:r>
@@ -2506,7 +2283,7 @@
           <a:bodyPr wrap="square" lIns="0" tIns="0" rIns="0" bIns="0" rtlCol="0" anchor="ctr"/>
           <a:lstStyle/>
           <a:p>
-            <a:pPr indent="0" marL="0">
+            <a:pPr marL="0" indent="0">
               <a:lnSpc>
                 <a:spcPct val="110000"/>
               </a:lnSpc>
@@ -2548,7 +2325,7 @@
           <a:bodyPr wrap="square" lIns="0" tIns="0" rIns="0" bIns="0" rtlCol="0" anchor="ctr"/>
           <a:lstStyle/>
           <a:p>
-            <a:pPr indent="0" marL="0">
+            <a:pPr marL="0" indent="0">
               <a:buNone/>
             </a:pPr>
             <a:r>
@@ -2614,7 +2391,7 @@
           <a:bodyPr wrap="square" lIns="0" tIns="0" rIns="0" bIns="0" rtlCol="0" anchor="ctr"/>
           <a:lstStyle/>
           <a:p>
-            <a:pPr indent="0" marL="0">
+            <a:pPr marL="0" indent="0">
               <a:buNone/>
             </a:pPr>
             <a:r>
@@ -2653,7 +2430,7 @@
           <a:bodyPr wrap="square" lIns="0" tIns="0" rIns="0" bIns="0" rtlCol="0" anchor="ctr"/>
           <a:lstStyle/>
           <a:p>
-            <a:pPr indent="0" marL="0">
+            <a:pPr marL="0" indent="0">
               <a:buNone/>
             </a:pPr>
             <a:r>
@@ -2719,7 +2496,7 @@
           <a:bodyPr wrap="square" lIns="0" tIns="0" rIns="0" bIns="0" rtlCol="0" anchor="ctr"/>
           <a:lstStyle/>
           <a:p>
-            <a:pPr indent="0" marL="0">
+            <a:pPr marL="0" indent="0">
               <a:buNone/>
             </a:pPr>
             <a:r>
@@ -2758,7 +2535,7 @@
           <a:bodyPr wrap="square" lIns="0" tIns="0" rIns="0" bIns="0" rtlCol="0" anchor="ctr"/>
           <a:lstStyle/>
           <a:p>
-            <a:pPr indent="0" marL="0">
+            <a:pPr marL="0" indent="0">
               <a:buNone/>
             </a:pPr>
             <a:r>
@@ -2824,7 +2601,7 @@
           <a:bodyPr wrap="square" lIns="0" tIns="0" rIns="0" bIns="0" rtlCol="0" anchor="ctr"/>
           <a:lstStyle/>
           <a:p>
-            <a:pPr indent="0" marL="0">
+            <a:pPr marL="0" indent="0">
               <a:buNone/>
             </a:pPr>
             <a:r>
@@ -2863,7 +2640,7 @@
           <a:bodyPr wrap="square" lIns="0" tIns="0" rIns="0" bIns="0" rtlCol="0" anchor="ctr"/>
           <a:lstStyle/>
           <a:p>
-            <a:pPr indent="0" marL="0">
+            <a:pPr marL="0" indent="0">
               <a:buNone/>
             </a:pPr>
             <a:r>
@@ -2929,7 +2706,7 @@
           <a:bodyPr wrap="square" lIns="0" tIns="0" rIns="0" bIns="0" rtlCol="0" anchor="ctr"/>
           <a:lstStyle/>
           <a:p>
-            <a:pPr indent="0" marL="0">
+            <a:pPr marL="0" indent="0">
               <a:buNone/>
             </a:pPr>
             <a:r>
@@ -2968,7 +2745,7 @@
           <a:bodyPr wrap="square" lIns="0" tIns="0" rIns="0" bIns="0" rtlCol="0" anchor="ctr"/>
           <a:lstStyle/>
           <a:p>
-            <a:pPr indent="0" marL="0">
+            <a:pPr marL="0" indent="0">
               <a:buNone/>
             </a:pPr>
             <a:r>
@@ -3034,7 +2811,7 @@
           <a:bodyPr wrap="square" lIns="0" tIns="0" rIns="0" bIns="0" rtlCol="0" anchor="ctr"/>
           <a:lstStyle/>
           <a:p>
-            <a:pPr indent="0" marL="0">
+            <a:pPr marL="0" indent="0">
               <a:buNone/>
             </a:pPr>
             <a:r>
@@ -3073,7 +2850,7 @@
           <a:bodyPr wrap="square" lIns="0" tIns="0" rIns="0" bIns="0" rtlCol="0" anchor="ctr"/>
           <a:lstStyle/>
           <a:p>
-            <a:pPr indent="0" marL="0">
+            <a:pPr marL="0" indent="0">
               <a:buNone/>
             </a:pPr>
             <a:r>
@@ -3139,7 +2916,7 @@
           <a:bodyPr wrap="square" lIns="0" tIns="0" rIns="0" bIns="0" rtlCol="0" anchor="ctr"/>
           <a:lstStyle/>
           <a:p>
-            <a:pPr indent="0" marL="0">
+            <a:pPr marL="0" indent="0">
               <a:buNone/>
             </a:pPr>
             <a:r>
@@ -3178,7 +2955,7 @@
           <a:bodyPr wrap="square" lIns="0" tIns="0" rIns="0" bIns="0" rtlCol="0" anchor="ctr"/>
           <a:lstStyle/>
           <a:p>
-            <a:pPr indent="0" marL="0">
+            <a:pPr marL="0" indent="0">
               <a:buNone/>
             </a:pPr>
             <a:r>
@@ -3217,7 +2994,7 @@
           <a:bodyPr wrap="square" lIns="0" tIns="0" rIns="0" bIns="0" rtlCol="0" anchor="ctr"/>
           <a:lstStyle/>
           <a:p>
-            <a:pPr indent="0" marL="0">
+            <a:pPr marL="0" indent="0">
               <a:buNone/>
             </a:pPr>
             <a:r>
@@ -3251,6 +3028,7 @@
         <a:solidFill>
           <a:srgbClr val="17132E"/>
         </a:solidFill>
+        <a:effectLst/>
       </p:bgPr>
     </p:bg>
     <p:spTree>
@@ -3310,7 +3088,7 @@
           <a:bodyPr wrap="square" lIns="0" tIns="0" rIns="0" bIns="0" rtlCol="0" anchor="ctr"/>
           <a:lstStyle/>
           <a:p>
-            <a:pPr indent="0" marL="0">
+            <a:pPr marL="0" indent="0">
               <a:buNone/>
             </a:pPr>
             <a:r>
@@ -3476,7 +3254,7 @@
           <a:bodyPr wrap="square" lIns="0" tIns="0" rIns="0" bIns="0" rtlCol="0" anchor="ctr"/>
           <a:lstStyle/>
           <a:p>
-            <a:pPr indent="0" marL="0">
+            <a:pPr marL="0" indent="0">
               <a:buNone/>
             </a:pPr>
             <a:r>
@@ -3510,6 +3288,7 @@
         <a:solidFill>
           <a:srgbClr val="17132E"/>
         </a:solidFill>
+        <a:effectLst/>
       </p:bgPr>
     </p:bg>
     <p:spTree>
@@ -3547,7 +3326,7 @@
           <a:bodyPr wrap="square" lIns="0" tIns="0" rIns="0" bIns="0" rtlCol="0" anchor="ctr"/>
           <a:lstStyle/>
           <a:p>
-            <a:pPr indent="0" marL="0">
+            <a:pPr marL="0" indent="0">
               <a:buNone/>
             </a:pPr>
             <a:r>
@@ -3586,7 +3365,7 @@
           <a:bodyPr wrap="square" lIns="0" tIns="0" rIns="0" bIns="0" rtlCol="0" anchor="ctr"/>
           <a:lstStyle/>
           <a:p>
-            <a:pPr indent="0" marL="0">
+            <a:pPr marL="0" indent="0">
               <a:buNone/>
             </a:pPr>
             <a:r>
@@ -3652,7 +3431,7 @@
           <a:bodyPr wrap="square" lIns="0" tIns="0" rIns="0" bIns="0" rtlCol="0" anchor="ctr"/>
           <a:lstStyle/>
           <a:p>
-            <a:pPr indent="0" marL="0">
+            <a:pPr marL="0" indent="0">
               <a:buNone/>
             </a:pPr>
             <a:r>
@@ -3691,7 +3470,7 @@
           <a:bodyPr wrap="square" lIns="0" tIns="0" rIns="0" bIns="0" rtlCol="0" anchor="ctr"/>
           <a:lstStyle/>
           <a:p>
-            <a:pPr indent="0" marL="0">
+            <a:pPr marL="0" indent="0">
               <a:buNone/>
             </a:pPr>
             <a:r>
@@ -3730,7 +3509,7 @@
           <a:bodyPr wrap="square" lIns="0" tIns="0" rIns="0" bIns="0" rtlCol="0" anchor="ctr"/>
           <a:lstStyle/>
           <a:p>
-            <a:pPr indent="0" marL="0">
+            <a:pPr marL="0" indent="0">
               <a:buNone/>
             </a:pPr>
             <a:r>
@@ -3796,7 +3575,7 @@
           <a:bodyPr wrap="square" lIns="0" tIns="0" rIns="0" bIns="0" rtlCol="0" anchor="ctr"/>
           <a:lstStyle/>
           <a:p>
-            <a:pPr indent="0" marL="0">
+            <a:pPr marL="0" indent="0">
               <a:buNone/>
             </a:pPr>
             <a:r>
@@ -3835,7 +3614,7 @@
           <a:bodyPr wrap="square" lIns="0" tIns="0" rIns="0" bIns="0" rtlCol="0" anchor="ctr"/>
           <a:lstStyle/>
           <a:p>
-            <a:pPr indent="0" marL="0">
+            <a:pPr marL="0" indent="0">
               <a:buNone/>
             </a:pPr>
             <a:r>
@@ -3874,7 +3653,7 @@
           <a:bodyPr wrap="square" lIns="0" tIns="0" rIns="0" bIns="0" rtlCol="0" anchor="ctr"/>
           <a:lstStyle/>
           <a:p>
-            <a:pPr indent="0" marL="0">
+            <a:pPr marL="0" indent="0">
               <a:buNone/>
             </a:pPr>
             <a:r>
@@ -3940,7 +3719,7 @@
           <a:bodyPr wrap="square" lIns="0" tIns="0" rIns="0" bIns="0" rtlCol="0" anchor="ctr"/>
           <a:lstStyle/>
           <a:p>
-            <a:pPr indent="0" marL="0">
+            <a:pPr marL="0" indent="0">
               <a:buNone/>
             </a:pPr>
             <a:r>
@@ -3979,7 +3758,7 @@
           <a:bodyPr wrap="square" lIns="0" tIns="0" rIns="0" bIns="0" rtlCol="0" anchor="ctr"/>
           <a:lstStyle/>
           <a:p>
-            <a:pPr indent="0" marL="0">
+            <a:pPr marL="0" indent="0">
               <a:buNone/>
             </a:pPr>
             <a:r>
@@ -4018,7 +3797,7 @@
           <a:bodyPr wrap="square" lIns="0" tIns="0" rIns="0" bIns="0" rtlCol="0" anchor="ctr"/>
           <a:lstStyle/>
           <a:p>
-            <a:pPr indent="0" marL="0">
+            <a:pPr marL="0" indent="0">
               <a:buNone/>
             </a:pPr>
             <a:r>
@@ -4084,7 +3863,7 @@
           <a:bodyPr wrap="square" lIns="0" tIns="0" rIns="0" bIns="0" rtlCol="0" anchor="ctr"/>
           <a:lstStyle/>
           <a:p>
-            <a:pPr indent="0" marL="0">
+            <a:pPr marL="0" indent="0">
               <a:buNone/>
             </a:pPr>
             <a:r>
@@ -4123,7 +3902,7 @@
           <a:bodyPr wrap="square" lIns="0" tIns="0" rIns="0" bIns="0" rtlCol="0" anchor="ctr"/>
           <a:lstStyle/>
           <a:p>
-            <a:pPr indent="0" marL="0">
+            <a:pPr marL="0" indent="0">
               <a:buNone/>
             </a:pPr>
             <a:r>
@@ -4162,7 +3941,7 @@
           <a:bodyPr wrap="square" lIns="0" tIns="0" rIns="0" bIns="0" rtlCol="0" anchor="ctr"/>
           <a:lstStyle/>
           <a:p>
-            <a:pPr indent="0" marL="0">
+            <a:pPr marL="0" indent="0">
               <a:buNone/>
             </a:pPr>
             <a:r>
@@ -4228,7 +4007,7 @@
           <a:bodyPr wrap="square" lIns="0" tIns="0" rIns="0" bIns="0" rtlCol="0" anchor="ctr"/>
           <a:lstStyle/>
           <a:p>
-            <a:pPr indent="0" marL="0">
+            <a:pPr marL="0" indent="0">
               <a:buNone/>
             </a:pPr>
             <a:r>
@@ -4262,6 +4041,7 @@
         <a:solidFill>
           <a:srgbClr val="17132E"/>
         </a:solidFill>
+        <a:effectLst/>
       </p:bgPr>
     </p:bg>
     <p:spTree>
@@ -4321,11 +4101,11 @@
           <a:bodyPr wrap="square" lIns="0" tIns="0" rIns="0" bIns="0" rtlCol="0" anchor="ctr"/>
           <a:lstStyle/>
           <a:p>
-            <a:pPr algn="ctr" indent="0" marL="0">
-              <a:buNone/>
-            </a:pPr>
-            <a:r>
-              <a:rPr lang="en-US" sz="1600" b="1" spc="100" kern="0" dirty="0">
+            <a:pPr marL="0" indent="0" algn="ctr">
+              <a:buNone/>
+            </a:pPr>
+            <a:r>
+              <a:rPr lang="en-US" sz="1600" b="1" kern="0" spc="100" dirty="0">
                 <a:solidFill>
                   <a:srgbClr val="17132E"/>
                 </a:solidFill>
@@ -4360,7 +4140,7 @@
           <a:bodyPr wrap="square" lIns="0" tIns="0" rIns="0" bIns="0" rtlCol="0" anchor="ctr"/>
           <a:lstStyle/>
           <a:p>
-            <a:pPr indent="0" marL="0">
+            <a:pPr marL="0" indent="0">
               <a:buNone/>
             </a:pPr>
             <a:r>
@@ -4426,7 +4206,7 @@
           <a:bodyPr wrap="square" lIns="0" tIns="0" rIns="0" bIns="0" rtlCol="0" anchor="ctr"/>
           <a:lstStyle/>
           <a:p>
-            <a:pPr algn="ctr" indent="0" marL="0">
+            <a:pPr marL="0" indent="0" algn="ctr">
               <a:buNone/>
             </a:pPr>
             <a:r>
@@ -4512,7 +4292,7 @@
           <a:bodyPr wrap="square" lIns="0" tIns="0" rIns="0" bIns="0" rtlCol="0" anchor="ctr"/>
           <a:lstStyle/>
           <a:p>
-            <a:pPr algn="ctr" indent="0" marL="0">
+            <a:pPr marL="0" indent="0" algn="ctr">
               <a:buNone/>
             </a:pPr>
             <a:r>
@@ -4551,7 +4331,7 @@
           <a:bodyPr wrap="square" lIns="0" tIns="0" rIns="0" bIns="0" rtlCol="0" anchor="ctr"/>
           <a:lstStyle/>
           <a:p>
-            <a:pPr indent="0" marL="0">
+            <a:pPr marL="0" indent="0">
               <a:buNone/>
             </a:pPr>
             <a:r>
@@ -4590,11 +4370,11 @@
           <a:bodyPr wrap="square" lIns="0" tIns="0" rIns="0" bIns="0" rtlCol="0" anchor="ctr"/>
           <a:lstStyle/>
           <a:p>
-            <a:pPr indent="0" marL="0">
-              <a:buNone/>
-            </a:pPr>
-            <a:r>
-              <a:rPr lang="en-US" sz="1500" dirty="0">
+            <a:pPr marL="0" indent="0">
+              <a:buNone/>
+            </a:pPr>
+            <a:r>
+              <a:rPr lang="en-US" sz="2400" dirty="0">
                 <a:solidFill>
                   <a:srgbClr val="FFFFFF"/>
                 </a:solidFill>
@@ -4604,7 +4384,7 @@
               </a:rPr>
               <a:t>Выведи на экран три строки: свою фамилию и имя, класс, название школы.</a:t>
             </a:r>
-            <a:endParaRPr lang="en-US" sz="1500" dirty="0"/>
+            <a:endParaRPr lang="en-US" sz="2400" dirty="0"/>
           </a:p>
         </p:txBody>
       </p:sp>
@@ -4629,7 +4409,7 @@
           <a:bodyPr wrap="square" lIns="0" tIns="0" rIns="0" bIns="0" rtlCol="0" anchor="ctr"/>
           <a:lstStyle/>
           <a:p>
-            <a:pPr indent="0" marL="0">
+            <a:pPr marL="0" indent="0">
               <a:buNone/>
             </a:pPr>
             <a:r>
@@ -4695,16 +4475,16 @@
           <a:bodyPr wrap="square" lIns="0" tIns="0" rIns="0" bIns="0" rtlCol="0" anchor="ctr"/>
           <a:lstStyle/>
           <a:p>
-            <a:pPr indent="0" marL="0">
+            <a:pPr marL="0" indent="0">
               <a:lnSpc>
                 <a:spcPct val="110000"/>
               </a:lnSpc>
               <a:buNone/>
             </a:pPr>
             <a:r>
-              <a:rPr lang="en-US" sz="1400" dirty="0">
-                <a:solidFill>
-                  <a:srgbClr val="4FD1E0"/>
+              <a:rPr lang="en-US" sz="2000" dirty="0">
+                <a:solidFill>
+                  <a:schemeClr val="bg1"/>
                 </a:solidFill>
                 <a:latin typeface="Consolas" pitchFamily="34" charset="0"/>
                 <a:ea typeface="Consolas" pitchFamily="34" charset="-122"/>
@@ -4712,19 +4492,23 @@
               </a:rPr>
               <a:t>Мусоев Фаррух</a:t>
             </a:r>
-            <a:endParaRPr lang="en-US" sz="1400" dirty="0"/>
-          </a:p>
-          <a:p>
-            <a:pPr indent="0" marL="0">
+            <a:endParaRPr lang="en-US" sz="2000" dirty="0">
+              <a:solidFill>
+                <a:schemeClr val="bg1"/>
+              </a:solidFill>
+            </a:endParaRPr>
+          </a:p>
+          <a:p>
+            <a:pPr marL="0" indent="0">
               <a:lnSpc>
                 <a:spcPct val="110000"/>
               </a:lnSpc>
               <a:buNone/>
             </a:pPr>
             <a:r>
-              <a:rPr lang="en-US" sz="1400" dirty="0">
-                <a:solidFill>
-                  <a:srgbClr val="4FD1E0"/>
+              <a:rPr lang="en-US" sz="2000" dirty="0">
+                <a:solidFill>
+                  <a:schemeClr val="bg1"/>
                 </a:solidFill>
                 <a:latin typeface="Consolas" pitchFamily="34" charset="0"/>
                 <a:ea typeface="Consolas" pitchFamily="34" charset="-122"/>
@@ -4732,19 +4516,23 @@
               </a:rPr>
               <a:t>10 класс</a:t>
             </a:r>
-            <a:endParaRPr lang="en-US" sz="1400" dirty="0"/>
-          </a:p>
-          <a:p>
-            <a:pPr indent="0" marL="0">
+            <a:endParaRPr lang="en-US" sz="2000" dirty="0">
+              <a:solidFill>
+                <a:schemeClr val="bg1"/>
+              </a:solidFill>
+            </a:endParaRPr>
+          </a:p>
+          <a:p>
+            <a:pPr marL="0" indent="0">
               <a:lnSpc>
                 <a:spcPct val="110000"/>
               </a:lnSpc>
               <a:buNone/>
             </a:pPr>
             <a:r>
-              <a:rPr lang="en-US" sz="1400" dirty="0">
-                <a:solidFill>
-                  <a:srgbClr val="4FD1E0"/>
+              <a:rPr lang="en-US" sz="2000" dirty="0">
+                <a:solidFill>
+                  <a:schemeClr val="bg1"/>
                 </a:solidFill>
                 <a:latin typeface="Consolas" pitchFamily="34" charset="0"/>
                 <a:ea typeface="Consolas" pitchFamily="34" charset="-122"/>
@@ -4752,7 +4540,11 @@
               </a:rPr>
               <a:t>Школа № 12</a:t>
             </a:r>
-            <a:endParaRPr lang="en-US" sz="1400" dirty="0"/>
+            <a:endParaRPr lang="en-US" sz="2000" dirty="0">
+              <a:solidFill>
+                <a:schemeClr val="bg1"/>
+              </a:solidFill>
+            </a:endParaRPr>
           </a:p>
         </p:txBody>
       </p:sp>
@@ -4777,13 +4569,13 @@
           <a:bodyPr wrap="square" lIns="0" tIns="0" rIns="0" bIns="0" rtlCol="0" anchor="ctr"/>
           <a:lstStyle/>
           <a:p>
-            <a:pPr indent="0" marL="0">
-              <a:buNone/>
-            </a:pPr>
-            <a:r>
-              <a:rPr lang="en-US" sz="1300" i="1" dirty="0">
-                <a:solidFill>
-                  <a:srgbClr val="A9A3C4"/>
+            <a:pPr marL="0" indent="0">
+              <a:buNone/>
+            </a:pPr>
+            <a:r>
+              <a:rPr lang="en-US" sz="2000" i="1" dirty="0">
+                <a:solidFill>
+                  <a:schemeClr val="bg1"/>
                 </a:solidFill>
                 <a:latin typeface="Calibri" pitchFamily="34" charset="0"/>
                 <a:ea typeface="Calibri" pitchFamily="34" charset="-122"/>
@@ -4791,7 +4583,11 @@
               </a:rPr>
               <a:t>Нужны три команды print, текст в кавычках.</a:t>
             </a:r>
-            <a:endParaRPr lang="en-US" sz="1300" dirty="0"/>
+            <a:endParaRPr lang="en-US" sz="2000" dirty="0">
+              <a:solidFill>
+                <a:schemeClr val="bg1"/>
+              </a:solidFill>
+            </a:endParaRPr>
           </a:p>
         </p:txBody>
       </p:sp>
@@ -4863,7 +4659,7 @@
           <a:bodyPr wrap="square" lIns="0" tIns="0" rIns="0" bIns="0" rtlCol="0" anchor="ctr"/>
           <a:lstStyle/>
           <a:p>
-            <a:pPr algn="ctr" indent="0" marL="0">
+            <a:pPr marL="0" indent="0" algn="ctr">
               <a:buNone/>
             </a:pPr>
             <a:r>
@@ -4902,7 +4698,7 @@
           <a:bodyPr wrap="square" lIns="0" tIns="0" rIns="0" bIns="0" rtlCol="0" anchor="ctr"/>
           <a:lstStyle/>
           <a:p>
-            <a:pPr indent="0" marL="0">
+            <a:pPr marL="0" indent="0">
               <a:buNone/>
             </a:pPr>
             <a:r>
@@ -4941,11 +4737,11 @@
           <a:bodyPr wrap="square" lIns="0" tIns="0" rIns="0" bIns="0" rtlCol="0" anchor="ctr"/>
           <a:lstStyle/>
           <a:p>
-            <a:pPr indent="0" marL="0">
-              <a:buNone/>
-            </a:pPr>
-            <a:r>
-              <a:rPr lang="en-US" sz="1500" dirty="0">
+            <a:pPr marL="0" indent="0">
+              <a:buNone/>
+            </a:pPr>
+            <a:r>
+              <a:rPr lang="en-US" sz="2400" dirty="0">
                 <a:solidFill>
                   <a:srgbClr val="FFFFFF"/>
                 </a:solidFill>
@@ -4955,7 +4751,7 @@
               </a:rPr>
               <a:t>Объяви три переменные: imya, klass, ball. Выведи каждую с подписью.</a:t>
             </a:r>
-            <a:endParaRPr lang="en-US" sz="1500" dirty="0"/>
+            <a:endParaRPr lang="en-US" sz="2400" dirty="0"/>
           </a:p>
         </p:txBody>
       </p:sp>
@@ -4980,7 +4776,7 @@
           <a:bodyPr wrap="square" lIns="0" tIns="0" rIns="0" bIns="0" rtlCol="0" anchor="ctr"/>
           <a:lstStyle/>
           <a:p>
-            <a:pPr indent="0" marL="0">
+            <a:pPr marL="0" indent="0">
               <a:buNone/>
             </a:pPr>
             <a:r>
@@ -5046,16 +4842,16 @@
           <a:bodyPr wrap="square" lIns="0" tIns="0" rIns="0" bIns="0" rtlCol="0" anchor="ctr"/>
           <a:lstStyle/>
           <a:p>
-            <a:pPr indent="0" marL="0">
+            <a:pPr marL="0" indent="0">
               <a:lnSpc>
                 <a:spcPct val="110000"/>
               </a:lnSpc>
               <a:buNone/>
             </a:pPr>
             <a:r>
-              <a:rPr lang="en-US" sz="1400" dirty="0">
-                <a:solidFill>
-                  <a:srgbClr val="4FD1E0"/>
+              <a:rPr lang="en-US" sz="2000" dirty="0">
+                <a:solidFill>
+                  <a:schemeClr val="bg1"/>
                 </a:solidFill>
                 <a:latin typeface="Consolas" pitchFamily="34" charset="0"/>
                 <a:ea typeface="Consolas" pitchFamily="34" charset="-122"/>
@@ -5063,19 +4859,23 @@
               </a:rPr>
               <a:t>imya = "Фаррух"</a:t>
             </a:r>
-            <a:endParaRPr lang="en-US" sz="1400" dirty="0"/>
-          </a:p>
-          <a:p>
-            <a:pPr indent="0" marL="0">
+            <a:endParaRPr lang="en-US" sz="2000" dirty="0">
+              <a:solidFill>
+                <a:schemeClr val="bg1"/>
+              </a:solidFill>
+            </a:endParaRPr>
+          </a:p>
+          <a:p>
+            <a:pPr marL="0" indent="0">
               <a:lnSpc>
                 <a:spcPct val="110000"/>
               </a:lnSpc>
               <a:buNone/>
             </a:pPr>
             <a:r>
-              <a:rPr lang="en-US" sz="1400" dirty="0">
-                <a:solidFill>
-                  <a:srgbClr val="4FD1E0"/>
+              <a:rPr lang="en-US" sz="2000" dirty="0">
+                <a:solidFill>
+                  <a:schemeClr val="bg1"/>
                 </a:solidFill>
                 <a:latin typeface="Consolas" pitchFamily="34" charset="0"/>
                 <a:ea typeface="Consolas" pitchFamily="34" charset="-122"/>
@@ -5083,19 +4883,23 @@
               </a:rPr>
               <a:t>klass = 10</a:t>
             </a:r>
-            <a:endParaRPr lang="en-US" sz="1400" dirty="0"/>
-          </a:p>
-          <a:p>
-            <a:pPr indent="0" marL="0">
+            <a:endParaRPr lang="en-US" sz="2000" dirty="0">
+              <a:solidFill>
+                <a:schemeClr val="bg1"/>
+              </a:solidFill>
+            </a:endParaRPr>
+          </a:p>
+          <a:p>
+            <a:pPr marL="0" indent="0">
               <a:lnSpc>
                 <a:spcPct val="110000"/>
               </a:lnSpc>
               <a:buNone/>
             </a:pPr>
             <a:r>
-              <a:rPr lang="en-US" sz="1400" dirty="0">
-                <a:solidFill>
-                  <a:srgbClr val="4FD1E0"/>
+              <a:rPr lang="en-US" sz="2000" dirty="0">
+                <a:solidFill>
+                  <a:schemeClr val="bg1"/>
                 </a:solidFill>
                 <a:latin typeface="Consolas" pitchFamily="34" charset="0"/>
                 <a:ea typeface="Consolas" pitchFamily="34" charset="-122"/>
@@ -5103,7 +4907,11 @@
               </a:rPr>
               <a:t>ball = 4.5</a:t>
             </a:r>
-            <a:endParaRPr lang="en-US" sz="1400" dirty="0"/>
+            <a:endParaRPr lang="en-US" sz="2000" dirty="0">
+              <a:solidFill>
+                <a:schemeClr val="bg1"/>
+              </a:solidFill>
+            </a:endParaRPr>
           </a:p>
         </p:txBody>
       </p:sp>
@@ -5128,7 +4936,7 @@
           <a:bodyPr wrap="square" lIns="0" tIns="0" rIns="0" bIns="0" rtlCol="0" anchor="ctr"/>
           <a:lstStyle/>
           <a:p>
-            <a:pPr indent="0" marL="0">
+            <a:pPr marL="0" indent="0">
               <a:buNone/>
             </a:pPr>
             <a:r>
@@ -5194,16 +5002,16 @@
           <a:bodyPr wrap="square" lIns="0" tIns="0" rIns="0" bIns="0" rtlCol="0" anchor="ctr"/>
           <a:lstStyle/>
           <a:p>
-            <a:pPr indent="0" marL="0">
+            <a:pPr marL="0" indent="0">
               <a:lnSpc>
                 <a:spcPct val="110000"/>
               </a:lnSpc>
               <a:buNone/>
             </a:pPr>
             <a:r>
-              <a:rPr lang="en-US" sz="1400" dirty="0">
-                <a:solidFill>
-                  <a:srgbClr val="4FD1E0"/>
+              <a:rPr lang="en-US" dirty="0">
+                <a:solidFill>
+                  <a:schemeClr val="bg1"/>
                 </a:solidFill>
                 <a:latin typeface="Consolas" pitchFamily="34" charset="0"/>
                 <a:ea typeface="Consolas" pitchFamily="34" charset="-122"/>
@@ -5211,19 +5019,23 @@
               </a:rPr>
               <a:t>Имя: Фаррух</a:t>
             </a:r>
-            <a:endParaRPr lang="en-US" sz="1400" dirty="0"/>
-          </a:p>
-          <a:p>
-            <a:pPr indent="0" marL="0">
+            <a:endParaRPr lang="en-US" dirty="0">
+              <a:solidFill>
+                <a:schemeClr val="bg1"/>
+              </a:solidFill>
+            </a:endParaRPr>
+          </a:p>
+          <a:p>
+            <a:pPr marL="0" indent="0">
               <a:lnSpc>
                 <a:spcPct val="110000"/>
               </a:lnSpc>
               <a:buNone/>
             </a:pPr>
             <a:r>
-              <a:rPr lang="en-US" sz="1400" dirty="0">
-                <a:solidFill>
-                  <a:srgbClr val="4FD1E0"/>
+              <a:rPr lang="en-US" dirty="0">
+                <a:solidFill>
+                  <a:schemeClr val="bg1"/>
                 </a:solidFill>
                 <a:latin typeface="Consolas" pitchFamily="34" charset="0"/>
                 <a:ea typeface="Consolas" pitchFamily="34" charset="-122"/>
@@ -5231,19 +5043,23 @@
               </a:rPr>
               <a:t>Класс: 10</a:t>
             </a:r>
-            <a:endParaRPr lang="en-US" sz="1400" dirty="0"/>
-          </a:p>
-          <a:p>
-            <a:pPr indent="0" marL="0">
+            <a:endParaRPr lang="en-US" dirty="0">
+              <a:solidFill>
+                <a:schemeClr val="bg1"/>
+              </a:solidFill>
+            </a:endParaRPr>
+          </a:p>
+          <a:p>
+            <a:pPr marL="0" indent="0">
               <a:lnSpc>
                 <a:spcPct val="110000"/>
               </a:lnSpc>
               <a:buNone/>
             </a:pPr>
             <a:r>
-              <a:rPr lang="en-US" sz="1400" dirty="0">
-                <a:solidFill>
-                  <a:srgbClr val="4FD1E0"/>
+              <a:rPr lang="en-US" dirty="0">
+                <a:solidFill>
+                  <a:schemeClr val="bg1"/>
                 </a:solidFill>
                 <a:latin typeface="Consolas" pitchFamily="34" charset="0"/>
                 <a:ea typeface="Consolas" pitchFamily="34" charset="-122"/>
@@ -5251,7 +5067,11 @@
               </a:rPr>
               <a:t>Балл: 4.5</a:t>
             </a:r>
-            <a:endParaRPr lang="en-US" sz="1400" dirty="0"/>
+            <a:endParaRPr lang="en-US" dirty="0">
+              <a:solidFill>
+                <a:schemeClr val="bg1"/>
+              </a:solidFill>
+            </a:endParaRPr>
           </a:p>
         </p:txBody>
       </p:sp>
@@ -5276,13 +5096,13 @@
           <a:bodyPr wrap="square" lIns="0" tIns="0" rIns="0" bIns="0" rtlCol="0" anchor="ctr"/>
           <a:lstStyle/>
           <a:p>
-            <a:pPr indent="0" marL="0">
-              <a:buNone/>
-            </a:pPr>
-            <a:r>
-              <a:rPr lang="en-US" sz="1300" i="1" dirty="0">
-                <a:solidFill>
-                  <a:srgbClr val="A9A3C4"/>
+            <a:pPr marL="0" indent="0">
+              <a:buNone/>
+            </a:pPr>
+            <a:r>
+              <a:rPr lang="en-US" sz="2000" b="1" i="1" dirty="0">
+                <a:solidFill>
+                  <a:schemeClr val="bg1"/>
                 </a:solidFill>
                 <a:latin typeface="Calibri" pitchFamily="34" charset="0"/>
                 <a:ea typeface="Calibri" pitchFamily="34" charset="-122"/>
@@ -5290,7 +5110,11 @@
               </a:rPr>
               <a:t>print("Имя:", imya) — переменная без кавычек.</a:t>
             </a:r>
-            <a:endParaRPr lang="en-US" sz="1300" dirty="0"/>
+            <a:endParaRPr lang="en-US" sz="2000" b="1" dirty="0">
+              <a:solidFill>
+                <a:schemeClr val="bg1"/>
+              </a:solidFill>
+            </a:endParaRPr>
           </a:p>
         </p:txBody>
       </p:sp>
@@ -5310,6 +5134,7 @@
         <a:solidFill>
           <a:srgbClr val="17132E"/>
         </a:solidFill>
+        <a:effectLst/>
       </p:bgPr>
     </p:bg>
     <p:spTree>
@@ -5369,11 +5194,11 @@
           <a:bodyPr wrap="square" lIns="0" tIns="0" rIns="0" bIns="0" rtlCol="0" anchor="ctr"/>
           <a:lstStyle/>
           <a:p>
-            <a:pPr algn="ctr" indent="0" marL="0">
-              <a:buNone/>
-            </a:pPr>
-            <a:r>
-              <a:rPr lang="en-US" sz="1600" b="1" spc="100" kern="0" dirty="0">
+            <a:pPr marL="0" indent="0" algn="ctr">
+              <a:buNone/>
+            </a:pPr>
+            <a:r>
+              <a:rPr lang="en-US" sz="1600" b="1" kern="0" spc="100" dirty="0">
                 <a:solidFill>
                   <a:srgbClr val="17132E"/>
                 </a:solidFill>
@@ -5408,7 +5233,7 @@
           <a:bodyPr wrap="square" lIns="0" tIns="0" rIns="0" bIns="0" rtlCol="0" anchor="ctr"/>
           <a:lstStyle/>
           <a:p>
-            <a:pPr indent="0" marL="0">
+            <a:pPr marL="0" indent="0">
               <a:buNone/>
             </a:pPr>
             <a:r>
@@ -5474,7 +5299,7 @@
           <a:bodyPr wrap="square" lIns="0" tIns="0" rIns="0" bIns="0" rtlCol="0" anchor="ctr"/>
           <a:lstStyle/>
           <a:p>
-            <a:pPr algn="ctr" indent="0" marL="0">
+            <a:pPr marL="0" indent="0" algn="ctr">
               <a:buNone/>
             </a:pPr>
             <a:r>
@@ -5560,7 +5385,7 @@
           <a:bodyPr wrap="square" lIns="0" tIns="0" rIns="0" bIns="0" rtlCol="0" anchor="ctr"/>
           <a:lstStyle/>
           <a:p>
-            <a:pPr algn="ctr" indent="0" marL="0">
+            <a:pPr marL="0" indent="0" algn="ctr">
               <a:buNone/>
             </a:pPr>
             <a:r>
@@ -5599,7 +5424,7 @@
           <a:bodyPr wrap="square" lIns="0" tIns="0" rIns="0" bIns="0" rtlCol="0" anchor="ctr"/>
           <a:lstStyle/>
           <a:p>
-            <a:pPr indent="0" marL="0">
+            <a:pPr marL="0" indent="0">
               <a:buNone/>
             </a:pPr>
             <a:r>
@@ -5638,11 +5463,11 @@
           <a:bodyPr wrap="square" lIns="0" tIns="0" rIns="0" bIns="0" rtlCol="0" anchor="ctr"/>
           <a:lstStyle/>
           <a:p>
-            <a:pPr indent="0" marL="0">
-              <a:buNone/>
-            </a:pPr>
-            <a:r>
-              <a:rPr lang="en-US" sz="1500" dirty="0">
+            <a:pPr marL="0" indent="0">
+              <a:buNone/>
+            </a:pPr>
+            <a:r>
+              <a:rPr lang="en-US" sz="2400" dirty="0">
                 <a:solidFill>
                   <a:srgbClr val="FFFFFF"/>
                 </a:solidFill>
@@ -5652,7 +5477,7 @@
               </a:rPr>
               <a:t>Даны длина и ширина. Вычисли периметр и площадь, выведи с подписями.</a:t>
             </a:r>
-            <a:endParaRPr lang="en-US" sz="1500" dirty="0"/>
+            <a:endParaRPr lang="en-US" sz="2400" dirty="0"/>
           </a:p>
         </p:txBody>
       </p:sp>
@@ -5677,7 +5502,7 @@
           <a:bodyPr wrap="square" lIns="0" tIns="0" rIns="0" bIns="0" rtlCol="0" anchor="ctr"/>
           <a:lstStyle/>
           <a:p>
-            <a:pPr indent="0" marL="0">
+            <a:pPr marL="0" indent="0">
               <a:buNone/>
             </a:pPr>
             <a:r>
@@ -5743,16 +5568,16 @@
           <a:bodyPr wrap="square" lIns="0" tIns="0" rIns="0" bIns="0" rtlCol="0" anchor="ctr"/>
           <a:lstStyle/>
           <a:p>
-            <a:pPr indent="0" marL="0">
+            <a:pPr marL="0" indent="0">
               <a:lnSpc>
                 <a:spcPct val="110000"/>
               </a:lnSpc>
               <a:buNone/>
             </a:pPr>
             <a:r>
-              <a:rPr lang="en-US" sz="1400" dirty="0">
-                <a:solidFill>
-                  <a:srgbClr val="4FD1E0"/>
+              <a:rPr lang="en-US" sz="2000" dirty="0">
+                <a:solidFill>
+                  <a:schemeClr val="bg1"/>
                 </a:solidFill>
                 <a:latin typeface="Consolas" pitchFamily="34" charset="0"/>
                 <a:ea typeface="Consolas" pitchFamily="34" charset="-122"/>
@@ -5760,19 +5585,23 @@
               </a:rPr>
               <a:t>dlina = 6</a:t>
             </a:r>
-            <a:endParaRPr lang="en-US" sz="1400" dirty="0"/>
-          </a:p>
-          <a:p>
-            <a:pPr indent="0" marL="0">
+            <a:endParaRPr lang="en-US" sz="2000" dirty="0">
+              <a:solidFill>
+                <a:schemeClr val="bg1"/>
+              </a:solidFill>
+            </a:endParaRPr>
+          </a:p>
+          <a:p>
+            <a:pPr marL="0" indent="0">
               <a:lnSpc>
                 <a:spcPct val="110000"/>
               </a:lnSpc>
               <a:buNone/>
             </a:pPr>
             <a:r>
-              <a:rPr lang="en-US" sz="1400" dirty="0">
-                <a:solidFill>
-                  <a:srgbClr val="4FD1E0"/>
+              <a:rPr lang="en-US" sz="2000" dirty="0">
+                <a:solidFill>
+                  <a:schemeClr val="bg1"/>
                 </a:solidFill>
                 <a:latin typeface="Consolas" pitchFamily="34" charset="0"/>
                 <a:ea typeface="Consolas" pitchFamily="34" charset="-122"/>
@@ -5780,7 +5609,11 @@
               </a:rPr>
               <a:t>shirina = 4</a:t>
             </a:r>
-            <a:endParaRPr lang="en-US" sz="1400" dirty="0"/>
+            <a:endParaRPr lang="en-US" sz="2000" dirty="0">
+              <a:solidFill>
+                <a:schemeClr val="bg1"/>
+              </a:solidFill>
+            </a:endParaRPr>
           </a:p>
         </p:txBody>
       </p:sp>
@@ -5805,7 +5638,7 @@
           <a:bodyPr wrap="square" lIns="0" tIns="0" rIns="0" bIns="0" rtlCol="0" anchor="ctr"/>
           <a:lstStyle/>
           <a:p>
-            <a:pPr indent="0" marL="0">
+            <a:pPr marL="0" indent="0">
               <a:buNone/>
             </a:pPr>
             <a:r>
@@ -5871,16 +5704,16 @@
           <a:bodyPr wrap="square" lIns="0" tIns="0" rIns="0" bIns="0" rtlCol="0" anchor="ctr"/>
           <a:lstStyle/>
           <a:p>
-            <a:pPr indent="0" marL="0">
+            <a:pPr marL="0" indent="0">
               <a:lnSpc>
                 <a:spcPct val="110000"/>
               </a:lnSpc>
               <a:buNone/>
             </a:pPr>
             <a:r>
-              <a:rPr lang="en-US" sz="1400" dirty="0">
-                <a:solidFill>
-                  <a:srgbClr val="4FD1E0"/>
+              <a:rPr lang="en-US" sz="2000" dirty="0">
+                <a:solidFill>
+                  <a:schemeClr val="bg1"/>
                 </a:solidFill>
                 <a:latin typeface="Consolas" pitchFamily="34" charset="0"/>
                 <a:ea typeface="Consolas" pitchFamily="34" charset="-122"/>
@@ -5888,19 +5721,23 @@
               </a:rPr>
               <a:t>Периметр: 20</a:t>
             </a:r>
-            <a:endParaRPr lang="en-US" sz="1400" dirty="0"/>
-          </a:p>
-          <a:p>
-            <a:pPr indent="0" marL="0">
+            <a:endParaRPr lang="en-US" sz="2000" dirty="0">
+              <a:solidFill>
+                <a:schemeClr val="bg1"/>
+              </a:solidFill>
+            </a:endParaRPr>
+          </a:p>
+          <a:p>
+            <a:pPr marL="0" indent="0">
               <a:lnSpc>
                 <a:spcPct val="110000"/>
               </a:lnSpc>
               <a:buNone/>
             </a:pPr>
             <a:r>
-              <a:rPr lang="en-US" sz="1400" dirty="0">
-                <a:solidFill>
-                  <a:srgbClr val="4FD1E0"/>
+              <a:rPr lang="en-US" sz="2000" dirty="0">
+                <a:solidFill>
+                  <a:schemeClr val="bg1"/>
                 </a:solidFill>
                 <a:latin typeface="Consolas" pitchFamily="34" charset="0"/>
                 <a:ea typeface="Consolas" pitchFamily="34" charset="-122"/>
@@ -5908,7 +5745,11 @@
               </a:rPr>
               <a:t>Площадь: 24</a:t>
             </a:r>
-            <a:endParaRPr lang="en-US" sz="1400" dirty="0"/>
+            <a:endParaRPr lang="en-US" sz="2000" dirty="0">
+              <a:solidFill>
+                <a:schemeClr val="bg1"/>
+              </a:solidFill>
+            </a:endParaRPr>
           </a:p>
         </p:txBody>
       </p:sp>
@@ -5933,7 +5774,7 @@
           <a:bodyPr wrap="square" lIns="0" tIns="0" rIns="0" bIns="0" rtlCol="0" anchor="ctr"/>
           <a:lstStyle/>
           <a:p>
-            <a:pPr indent="0" marL="0">
+            <a:pPr marL="0" indent="0">
               <a:buNone/>
             </a:pPr>
             <a:r>
@@ -6019,7 +5860,7 @@
           <a:bodyPr wrap="square" lIns="0" tIns="0" rIns="0" bIns="0" rtlCol="0" anchor="ctr"/>
           <a:lstStyle/>
           <a:p>
-            <a:pPr algn="ctr" indent="0" marL="0">
+            <a:pPr marL="0" indent="0" algn="ctr">
               <a:buNone/>
             </a:pPr>
             <a:r>
@@ -6058,7 +5899,7 @@
           <a:bodyPr wrap="square" lIns="0" tIns="0" rIns="0" bIns="0" rtlCol="0" anchor="ctr"/>
           <a:lstStyle/>
           <a:p>
-            <a:pPr indent="0" marL="0">
+            <a:pPr marL="0" indent="0">
               <a:buNone/>
             </a:pPr>
             <a:r>
@@ -6097,11 +5938,11 @@
           <a:bodyPr wrap="square" lIns="0" tIns="0" rIns="0" bIns="0" rtlCol="0" anchor="ctr"/>
           <a:lstStyle/>
           <a:p>
-            <a:pPr indent="0" marL="0">
-              <a:buNone/>
-            </a:pPr>
-            <a:r>
-              <a:rPr lang="en-US" sz="1500" dirty="0">
+            <a:pPr marL="0" indent="0">
+              <a:buNone/>
+            </a:pPr>
+            <a:r>
+              <a:rPr lang="en-US" sz="2400" dirty="0">
                 <a:solidFill>
                   <a:srgbClr val="FFFFFF"/>
                 </a:solidFill>
@@ -6111,7 +5952,7 @@
               </a:rPr>
               <a:t>Тетрадь стоит 5 сомони. Куплено 12 штук. Посчитай стоимость покупки.</a:t>
             </a:r>
-            <a:endParaRPr lang="en-US" sz="1500" dirty="0"/>
+            <a:endParaRPr lang="en-US" sz="2400" dirty="0"/>
           </a:p>
         </p:txBody>
       </p:sp>
@@ -6136,7 +5977,7 @@
           <a:bodyPr wrap="square" lIns="0" tIns="0" rIns="0" bIns="0" rtlCol="0" anchor="ctr"/>
           <a:lstStyle/>
           <a:p>
-            <a:pPr indent="0" marL="0">
+            <a:pPr marL="0" indent="0">
               <a:buNone/>
             </a:pPr>
             <a:r>
@@ -6202,16 +6043,16 @@
           <a:bodyPr wrap="square" lIns="0" tIns="0" rIns="0" bIns="0" rtlCol="0" anchor="ctr"/>
           <a:lstStyle/>
           <a:p>
-            <a:pPr indent="0" marL="0">
+            <a:pPr marL="0" indent="0">
               <a:lnSpc>
                 <a:spcPct val="110000"/>
               </a:lnSpc>
               <a:buNone/>
             </a:pPr>
             <a:r>
-              <a:rPr lang="en-US" sz="1400" dirty="0">
-                <a:solidFill>
-                  <a:srgbClr val="4FD1E0"/>
+              <a:rPr lang="en-US" sz="2000" dirty="0">
+                <a:solidFill>
+                  <a:schemeClr val="bg1"/>
                 </a:solidFill>
                 <a:latin typeface="Consolas" pitchFamily="34" charset="0"/>
                 <a:ea typeface="Consolas" pitchFamily="34" charset="-122"/>
@@ -6219,19 +6060,23 @@
               </a:rPr>
               <a:t>cena = 5</a:t>
             </a:r>
-            <a:endParaRPr lang="en-US" sz="1400" dirty="0"/>
-          </a:p>
-          <a:p>
-            <a:pPr indent="0" marL="0">
+            <a:endParaRPr lang="en-US" sz="2000" dirty="0">
+              <a:solidFill>
+                <a:schemeClr val="bg1"/>
+              </a:solidFill>
+            </a:endParaRPr>
+          </a:p>
+          <a:p>
+            <a:pPr marL="0" indent="0">
               <a:lnSpc>
                 <a:spcPct val="110000"/>
               </a:lnSpc>
               <a:buNone/>
             </a:pPr>
             <a:r>
-              <a:rPr lang="en-US" sz="1400" dirty="0">
-                <a:solidFill>
-                  <a:srgbClr val="4FD1E0"/>
+              <a:rPr lang="en-US" sz="2000" dirty="0">
+                <a:solidFill>
+                  <a:schemeClr val="bg1"/>
                 </a:solidFill>
                 <a:latin typeface="Consolas" pitchFamily="34" charset="0"/>
                 <a:ea typeface="Consolas" pitchFamily="34" charset="-122"/>
@@ -6239,7 +6084,11 @@
               </a:rPr>
               <a:t>kol = 12</a:t>
             </a:r>
-            <a:endParaRPr lang="en-US" sz="1400" dirty="0"/>
+            <a:endParaRPr lang="en-US" sz="2000" dirty="0">
+              <a:solidFill>
+                <a:schemeClr val="bg1"/>
+              </a:solidFill>
+            </a:endParaRPr>
           </a:p>
         </p:txBody>
       </p:sp>
@@ -6264,7 +6113,7 @@
           <a:bodyPr wrap="square" lIns="0" tIns="0" rIns="0" bIns="0" rtlCol="0" anchor="ctr"/>
           <a:lstStyle/>
           <a:p>
-            <a:pPr indent="0" marL="0">
+            <a:pPr marL="0" indent="0">
               <a:buNone/>
             </a:pPr>
             <a:r>
@@ -6330,16 +6179,16 @@
           <a:bodyPr wrap="square" lIns="0" tIns="0" rIns="0" bIns="0" rtlCol="0" anchor="ctr"/>
           <a:lstStyle/>
           <a:p>
-            <a:pPr indent="0" marL="0">
+            <a:pPr marL="0" indent="0">
               <a:lnSpc>
                 <a:spcPct val="110000"/>
               </a:lnSpc>
               <a:buNone/>
             </a:pPr>
             <a:r>
-              <a:rPr lang="en-US" sz="1400" dirty="0">
-                <a:solidFill>
-                  <a:srgbClr val="4FD1E0"/>
+              <a:rPr lang="en-US" sz="2000" dirty="0">
+                <a:solidFill>
+                  <a:schemeClr val="bg1"/>
                 </a:solidFill>
                 <a:latin typeface="Consolas" pitchFamily="34" charset="0"/>
                 <a:ea typeface="Consolas" pitchFamily="34" charset="-122"/>
@@ -6347,7 +6196,11 @@
               </a:rPr>
               <a:t>Стоимость: 60 сомони</a:t>
             </a:r>
-            <a:endParaRPr lang="en-US" sz="1400" dirty="0"/>
+            <a:endParaRPr lang="en-US" sz="2000" dirty="0">
+              <a:solidFill>
+                <a:schemeClr val="bg1"/>
+              </a:solidFill>
+            </a:endParaRPr>
           </a:p>
         </p:txBody>
       </p:sp>
@@ -6372,7 +6225,7 @@
           <a:bodyPr wrap="square" lIns="0" tIns="0" rIns="0" bIns="0" rtlCol="0" anchor="ctr"/>
           <a:lstStyle/>
           <a:p>
-            <a:pPr indent="0" marL="0">
+            <a:pPr marL="0" indent="0">
               <a:buNone/>
             </a:pPr>
             <a:r>
@@ -6406,6 +6259,7 @@
         <a:solidFill>
           <a:srgbClr val="17132E"/>
         </a:solidFill>
+        <a:effectLst/>
       </p:bgPr>
     </p:bg>
     <p:spTree>
@@ -6465,11 +6319,11 @@
           <a:bodyPr wrap="square" lIns="0" tIns="0" rIns="0" bIns="0" rtlCol="0" anchor="ctr"/>
           <a:lstStyle/>
           <a:p>
-            <a:pPr algn="ctr" indent="0" marL="0">
-              <a:buNone/>
-            </a:pPr>
-            <a:r>
-              <a:rPr lang="en-US" sz="1600" b="1" spc="100" kern="0" dirty="0">
+            <a:pPr marL="0" indent="0" algn="ctr">
+              <a:buNone/>
+            </a:pPr>
+            <a:r>
+              <a:rPr lang="en-US" sz="1600" b="1" kern="0" spc="100" dirty="0">
                 <a:solidFill>
                   <a:srgbClr val="17132E"/>
                 </a:solidFill>
@@ -6504,7 +6358,7 @@
           <a:bodyPr wrap="square" lIns="0" tIns="0" rIns="0" bIns="0" rtlCol="0" anchor="ctr"/>
           <a:lstStyle/>
           <a:p>
-            <a:pPr indent="0" marL="0">
+            <a:pPr marL="0" indent="0">
               <a:buNone/>
             </a:pPr>
             <a:r>
@@ -6570,7 +6424,7 @@
           <a:bodyPr wrap="square" lIns="0" tIns="0" rIns="0" bIns="0" rtlCol="0" anchor="ctr"/>
           <a:lstStyle/>
           <a:p>
-            <a:pPr algn="ctr" indent="0" marL="0">
+            <a:pPr marL="0" indent="0" algn="ctr">
               <a:buNone/>
             </a:pPr>
             <a:r>
@@ -6656,7 +6510,7 @@
           <a:bodyPr wrap="square" lIns="0" tIns="0" rIns="0" bIns="0" rtlCol="0" anchor="ctr"/>
           <a:lstStyle/>
           <a:p>
-            <a:pPr algn="ctr" indent="0" marL="0">
+            <a:pPr marL="0" indent="0" algn="ctr">
               <a:buNone/>
             </a:pPr>
             <a:r>
@@ -6695,7 +6549,7 @@
           <a:bodyPr wrap="square" lIns="0" tIns="0" rIns="0" bIns="0" rtlCol="0" anchor="ctr"/>
           <a:lstStyle/>
           <a:p>
-            <a:pPr indent="0" marL="0">
+            <a:pPr marL="0" indent="0">
               <a:buNone/>
             </a:pPr>
             <a:r>
@@ -6734,11 +6588,11 @@
           <a:bodyPr wrap="square" lIns="0" tIns="0" rIns="0" bIns="0" rtlCol="0" anchor="ctr"/>
           <a:lstStyle/>
           <a:p>
-            <a:pPr indent="0" marL="0">
-              <a:buNone/>
-            </a:pPr>
-            <a:r>
-              <a:rPr lang="en-US" sz="1500" dirty="0">
+            <a:pPr marL="0" indent="0">
+              <a:buNone/>
+            </a:pPr>
+            <a:r>
+              <a:rPr lang="en-US" sz="2400" dirty="0">
                 <a:solidFill>
                   <a:srgbClr val="FFFFFF"/>
                 </a:solidFill>
@@ -6748,7 +6602,7 @@
               </a:rPr>
               <a:t>Дано число минут. Переведи в часы и оставшиеся минуты.</a:t>
             </a:r>
-            <a:endParaRPr lang="en-US" sz="1500" dirty="0"/>
+            <a:endParaRPr lang="en-US" sz="2400" dirty="0"/>
           </a:p>
         </p:txBody>
       </p:sp>
@@ -6773,7 +6627,7 @@
           <a:bodyPr wrap="square" lIns="0" tIns="0" rIns="0" bIns="0" rtlCol="0" anchor="ctr"/>
           <a:lstStyle/>
           <a:p>
-            <a:pPr indent="0" marL="0">
+            <a:pPr marL="0" indent="0">
               <a:buNone/>
             </a:pPr>
             <a:r>
@@ -6839,16 +6693,16 @@
           <a:bodyPr wrap="square" lIns="0" tIns="0" rIns="0" bIns="0" rtlCol="0" anchor="ctr"/>
           <a:lstStyle/>
           <a:p>
-            <a:pPr indent="0" marL="0">
+            <a:pPr marL="0" indent="0">
               <a:lnSpc>
                 <a:spcPct val="110000"/>
               </a:lnSpc>
               <a:buNone/>
             </a:pPr>
             <a:r>
-              <a:rPr lang="en-US" sz="1400" dirty="0">
-                <a:solidFill>
-                  <a:srgbClr val="4FD1E0"/>
+              <a:rPr lang="en-US" sz="2000" dirty="0">
+                <a:solidFill>
+                  <a:schemeClr val="bg1"/>
                 </a:solidFill>
                 <a:latin typeface="Consolas" pitchFamily="34" charset="0"/>
                 <a:ea typeface="Consolas" pitchFamily="34" charset="-122"/>
@@ -6856,7 +6710,11 @@
               </a:rPr>
               <a:t>minuty = 100</a:t>
             </a:r>
-            <a:endParaRPr lang="en-US" sz="1400" dirty="0"/>
+            <a:endParaRPr lang="en-US" sz="2000" dirty="0">
+              <a:solidFill>
+                <a:schemeClr val="bg1"/>
+              </a:solidFill>
+            </a:endParaRPr>
           </a:p>
         </p:txBody>
       </p:sp>
@@ -6881,7 +6739,7 @@
           <a:bodyPr wrap="square" lIns="0" tIns="0" rIns="0" bIns="0" rtlCol="0" anchor="ctr"/>
           <a:lstStyle/>
           <a:p>
-            <a:pPr indent="0" marL="0">
+            <a:pPr marL="0" indent="0">
               <a:buNone/>
             </a:pPr>
             <a:r>
@@ -6947,16 +6805,16 @@
           <a:bodyPr wrap="square" lIns="0" tIns="0" rIns="0" bIns="0" rtlCol="0" anchor="ctr"/>
           <a:lstStyle/>
           <a:p>
-            <a:pPr indent="0" marL="0">
+            <a:pPr marL="0" indent="0">
               <a:lnSpc>
                 <a:spcPct val="110000"/>
               </a:lnSpc>
               <a:buNone/>
             </a:pPr>
             <a:r>
-              <a:rPr lang="en-US" sz="1400" dirty="0">
-                <a:solidFill>
-                  <a:srgbClr val="4FD1E0"/>
+              <a:rPr lang="en-US" sz="2000" dirty="0">
+                <a:solidFill>
+                  <a:schemeClr val="bg1"/>
                 </a:solidFill>
                 <a:latin typeface="Consolas" pitchFamily="34" charset="0"/>
                 <a:ea typeface="Consolas" pitchFamily="34" charset="-122"/>
@@ -6964,19 +6822,23 @@
               </a:rPr>
               <a:t>Часы: 1</a:t>
             </a:r>
-            <a:endParaRPr lang="en-US" sz="1400" dirty="0"/>
-          </a:p>
-          <a:p>
-            <a:pPr indent="0" marL="0">
+            <a:endParaRPr lang="en-US" sz="2000" dirty="0">
+              <a:solidFill>
+                <a:schemeClr val="bg1"/>
+              </a:solidFill>
+            </a:endParaRPr>
+          </a:p>
+          <a:p>
+            <a:pPr marL="0" indent="0">
               <a:lnSpc>
                 <a:spcPct val="110000"/>
               </a:lnSpc>
               <a:buNone/>
             </a:pPr>
             <a:r>
-              <a:rPr lang="en-US" sz="1400" dirty="0">
-                <a:solidFill>
-                  <a:srgbClr val="4FD1E0"/>
+              <a:rPr lang="en-US" sz="2000" dirty="0">
+                <a:solidFill>
+                  <a:schemeClr val="bg1"/>
                 </a:solidFill>
                 <a:latin typeface="Consolas" pitchFamily="34" charset="0"/>
                 <a:ea typeface="Consolas" pitchFamily="34" charset="-122"/>
@@ -6984,7 +6846,11 @@
               </a:rPr>
               <a:t>Минуты: 40</a:t>
             </a:r>
-            <a:endParaRPr lang="en-US" sz="1400" dirty="0"/>
+            <a:endParaRPr lang="en-US" sz="2000" dirty="0">
+              <a:solidFill>
+                <a:schemeClr val="bg1"/>
+              </a:solidFill>
+            </a:endParaRPr>
           </a:p>
         </p:txBody>
       </p:sp>
@@ -7009,7 +6875,7 @@
           <a:bodyPr wrap="square" lIns="0" tIns="0" rIns="0" bIns="0" rtlCol="0" anchor="ctr"/>
           <a:lstStyle/>
           <a:p>
-            <a:pPr indent="0" marL="0">
+            <a:pPr marL="0" indent="0">
               <a:buNone/>
             </a:pPr>
             <a:r>
@@ -7095,7 +6961,7 @@
           <a:bodyPr wrap="square" lIns="0" tIns="0" rIns="0" bIns="0" rtlCol="0" anchor="ctr"/>
           <a:lstStyle/>
           <a:p>
-            <a:pPr algn="ctr" indent="0" marL="0">
+            <a:pPr marL="0" indent="0" algn="ctr">
               <a:buNone/>
             </a:pPr>
             <a:r>
@@ -7134,7 +7000,7 @@
           <a:bodyPr wrap="square" lIns="0" tIns="0" rIns="0" bIns="0" rtlCol="0" anchor="ctr"/>
           <a:lstStyle/>
           <a:p>
-            <a:pPr indent="0" marL="0">
+            <a:pPr marL="0" indent="0">
               <a:buNone/>
             </a:pPr>
             <a:r>
@@ -7173,11 +7039,11 @@
           <a:bodyPr wrap="square" lIns="0" tIns="0" rIns="0" bIns="0" rtlCol="0" anchor="ctr"/>
           <a:lstStyle/>
           <a:p>
-            <a:pPr indent="0" marL="0">
-              <a:buNone/>
-            </a:pPr>
-            <a:r>
-              <a:rPr lang="en-US" sz="1500" dirty="0">
+            <a:pPr marL="0" indent="0">
+              <a:buNone/>
+            </a:pPr>
+            <a:r>
+              <a:rPr lang="en-US" sz="2400" dirty="0">
                 <a:solidFill>
                   <a:srgbClr val="FFFFFF"/>
                 </a:solidFill>
@@ -7187,7 +7053,7 @@
               </a:rPr>
               <a:t>Дано двузначное число. Выведи отдельно его десятки и единицы.</a:t>
             </a:r>
-            <a:endParaRPr lang="en-US" sz="1500" dirty="0"/>
+            <a:endParaRPr lang="en-US" sz="2400" dirty="0"/>
           </a:p>
         </p:txBody>
       </p:sp>
@@ -7212,7 +7078,7 @@
           <a:bodyPr wrap="square" lIns="0" tIns="0" rIns="0" bIns="0" rtlCol="0" anchor="ctr"/>
           <a:lstStyle/>
           <a:p>
-            <a:pPr indent="0" marL="0">
+            <a:pPr marL="0" indent="0">
               <a:buNone/>
             </a:pPr>
             <a:r>
@@ -7278,16 +7144,16 @@
           <a:bodyPr wrap="square" lIns="0" tIns="0" rIns="0" bIns="0" rtlCol="0" anchor="ctr"/>
           <a:lstStyle/>
           <a:p>
-            <a:pPr indent="0" marL="0">
+            <a:pPr marL="0" indent="0">
               <a:lnSpc>
                 <a:spcPct val="110000"/>
               </a:lnSpc>
               <a:buNone/>
             </a:pPr>
             <a:r>
-              <a:rPr lang="en-US" sz="1400" dirty="0">
-                <a:solidFill>
-                  <a:srgbClr val="4FD1E0"/>
+              <a:rPr lang="en-US" sz="2000" dirty="0">
+                <a:solidFill>
+                  <a:schemeClr val="bg1"/>
                 </a:solidFill>
                 <a:latin typeface="Consolas" pitchFamily="34" charset="0"/>
                 <a:ea typeface="Consolas" pitchFamily="34" charset="-122"/>
@@ -7295,7 +7161,11 @@
               </a:rPr>
               <a:t>n = 47</a:t>
             </a:r>
-            <a:endParaRPr lang="en-US" sz="1400" dirty="0"/>
+            <a:endParaRPr lang="en-US" sz="2000" dirty="0">
+              <a:solidFill>
+                <a:schemeClr val="bg1"/>
+              </a:solidFill>
+            </a:endParaRPr>
           </a:p>
         </p:txBody>
       </p:sp>
@@ -7320,7 +7190,7 @@
           <a:bodyPr wrap="square" lIns="0" tIns="0" rIns="0" bIns="0" rtlCol="0" anchor="ctr"/>
           <a:lstStyle/>
           <a:p>
-            <a:pPr indent="0" marL="0">
+            <a:pPr marL="0" indent="0">
               <a:buNone/>
             </a:pPr>
             <a:r>
@@ -7386,16 +7256,16 @@
           <a:bodyPr wrap="square" lIns="0" tIns="0" rIns="0" bIns="0" rtlCol="0" anchor="ctr"/>
           <a:lstStyle/>
           <a:p>
-            <a:pPr indent="0" marL="0">
+            <a:pPr marL="0" indent="0">
               <a:lnSpc>
                 <a:spcPct val="110000"/>
               </a:lnSpc>
               <a:buNone/>
             </a:pPr>
             <a:r>
-              <a:rPr lang="en-US" sz="1400" dirty="0">
-                <a:solidFill>
-                  <a:srgbClr val="4FD1E0"/>
+              <a:rPr lang="en-US" sz="2000" dirty="0">
+                <a:solidFill>
+                  <a:schemeClr val="bg1"/>
                 </a:solidFill>
                 <a:latin typeface="Consolas" pitchFamily="34" charset="0"/>
                 <a:ea typeface="Consolas" pitchFamily="34" charset="-122"/>
@@ -7403,19 +7273,23 @@
               </a:rPr>
               <a:t>Десятки: 4</a:t>
             </a:r>
-            <a:endParaRPr lang="en-US" sz="1400" dirty="0"/>
-          </a:p>
-          <a:p>
-            <a:pPr indent="0" marL="0">
+            <a:endParaRPr lang="en-US" sz="2000" dirty="0">
+              <a:solidFill>
+                <a:schemeClr val="bg1"/>
+              </a:solidFill>
+            </a:endParaRPr>
+          </a:p>
+          <a:p>
+            <a:pPr marL="0" indent="0">
               <a:lnSpc>
                 <a:spcPct val="110000"/>
               </a:lnSpc>
               <a:buNone/>
             </a:pPr>
             <a:r>
-              <a:rPr lang="en-US" sz="1400" dirty="0">
-                <a:solidFill>
-                  <a:srgbClr val="4FD1E0"/>
+              <a:rPr lang="en-US" sz="2000" dirty="0">
+                <a:solidFill>
+                  <a:schemeClr val="bg1"/>
                 </a:solidFill>
                 <a:latin typeface="Consolas" pitchFamily="34" charset="0"/>
                 <a:ea typeface="Consolas" pitchFamily="34" charset="-122"/>
@@ -7423,7 +7297,11 @@
               </a:rPr>
               <a:t>Единицы: 7</a:t>
             </a:r>
-            <a:endParaRPr lang="en-US" sz="1400" dirty="0"/>
+            <a:endParaRPr lang="en-US" sz="2000" dirty="0">
+              <a:solidFill>
+                <a:schemeClr val="bg1"/>
+              </a:solidFill>
+            </a:endParaRPr>
           </a:p>
         </p:txBody>
       </p:sp>
@@ -7448,7 +7326,7 @@
           <a:bodyPr wrap="square" lIns="0" tIns="0" rIns="0" bIns="0" rtlCol="0" anchor="ctr"/>
           <a:lstStyle/>
           <a:p>
-            <a:pPr indent="0" marL="0">
+            <a:pPr marL="0" indent="0">
               <a:buNone/>
             </a:pPr>
             <a:r>
@@ -7482,6 +7360,7 @@
         <a:solidFill>
           <a:srgbClr val="17132E"/>
         </a:solidFill>
+        <a:effectLst/>
       </p:bgPr>
     </p:bg>
     <p:spTree>
@@ -7541,11 +7420,11 @@
           <a:bodyPr wrap="square" lIns="0" tIns="0" rIns="0" bIns="0" rtlCol="0" anchor="ctr"/>
           <a:lstStyle/>
           <a:p>
-            <a:pPr algn="ctr" indent="0" marL="0">
-              <a:buNone/>
-            </a:pPr>
-            <a:r>
-              <a:rPr lang="en-US" sz="1600" b="1" spc="100" kern="0" dirty="0">
+            <a:pPr marL="0" indent="0" algn="ctr">
+              <a:buNone/>
+            </a:pPr>
+            <a:r>
+              <a:rPr lang="en-US" sz="1600" b="1" kern="0" spc="100" dirty="0">
                 <a:solidFill>
                   <a:srgbClr val="17132E"/>
                 </a:solidFill>
@@ -7580,7 +7459,7 @@
           <a:bodyPr wrap="square" lIns="0" tIns="0" rIns="0" bIns="0" rtlCol="0" anchor="ctr"/>
           <a:lstStyle/>
           <a:p>
-            <a:pPr indent="0" marL="0">
+            <a:pPr marL="0" indent="0">
               <a:buNone/>
             </a:pPr>
             <a:r>
@@ -7646,7 +7525,7 @@
           <a:bodyPr wrap="square" lIns="0" tIns="0" rIns="0" bIns="0" rtlCol="0" anchor="ctr"/>
           <a:lstStyle/>
           <a:p>
-            <a:pPr algn="ctr" indent="0" marL="0">
+            <a:pPr marL="0" indent="0" algn="ctr">
               <a:buNone/>
             </a:pPr>
             <a:r>
@@ -7732,7 +7611,7 @@
           <a:bodyPr wrap="square" lIns="0" tIns="0" rIns="0" bIns="0" rtlCol="0" anchor="ctr"/>
           <a:lstStyle/>
           <a:p>
-            <a:pPr algn="ctr" indent="0" marL="0">
+            <a:pPr marL="0" indent="0" algn="ctr">
               <a:buNone/>
             </a:pPr>
             <a:r>
@@ -7771,7 +7650,7 @@
           <a:bodyPr wrap="square" lIns="0" tIns="0" rIns="0" bIns="0" rtlCol="0" anchor="ctr"/>
           <a:lstStyle/>
           <a:p>
-            <a:pPr indent="0" marL="0">
+            <a:pPr marL="0" indent="0">
               <a:buNone/>
             </a:pPr>
             <a:r>
@@ -7810,11 +7689,11 @@
           <a:bodyPr wrap="square" lIns="0" tIns="0" rIns="0" bIns="0" rtlCol="0" anchor="ctr"/>
           <a:lstStyle/>
           <a:p>
-            <a:pPr indent="0" marL="0">
-              <a:buNone/>
-            </a:pPr>
-            <a:r>
-              <a:rPr lang="en-US" sz="1500" dirty="0">
+            <a:pPr marL="0" indent="0">
+              <a:buNone/>
+            </a:pPr>
+            <a:r>
+              <a:rPr lang="en-US" sz="2400" dirty="0">
                 <a:solidFill>
                   <a:srgbClr val="FFFFFF"/>
                 </a:solidFill>
@@ -7824,7 +7703,7 @@
               </a:rPr>
               <a:t>Дано трёхзначное число. Найди сумму его цифр.</a:t>
             </a:r>
-            <a:endParaRPr lang="en-US" sz="1500" dirty="0"/>
+            <a:endParaRPr lang="en-US" sz="2400" dirty="0"/>
           </a:p>
         </p:txBody>
       </p:sp>
@@ -7849,7 +7728,7 @@
           <a:bodyPr wrap="square" lIns="0" tIns="0" rIns="0" bIns="0" rtlCol="0" anchor="ctr"/>
           <a:lstStyle/>
           <a:p>
-            <a:pPr indent="0" marL="0">
+            <a:pPr marL="0" indent="0">
               <a:buNone/>
             </a:pPr>
             <a:r>
@@ -7915,16 +7794,16 @@
           <a:bodyPr wrap="square" lIns="0" tIns="0" rIns="0" bIns="0" rtlCol="0" anchor="ctr"/>
           <a:lstStyle/>
           <a:p>
-            <a:pPr indent="0" marL="0">
+            <a:pPr marL="0" indent="0">
               <a:lnSpc>
                 <a:spcPct val="110000"/>
               </a:lnSpc>
               <a:buNone/>
             </a:pPr>
             <a:r>
-              <a:rPr lang="en-US" sz="1400" dirty="0">
-                <a:solidFill>
-                  <a:srgbClr val="4FD1E0"/>
+              <a:rPr lang="en-US" sz="2000" dirty="0">
+                <a:solidFill>
+                  <a:schemeClr val="bg1"/>
                 </a:solidFill>
                 <a:latin typeface="Consolas" pitchFamily="34" charset="0"/>
                 <a:ea typeface="Consolas" pitchFamily="34" charset="-122"/>
@@ -7932,7 +7811,11 @@
               </a:rPr>
               <a:t>n = 385</a:t>
             </a:r>
-            <a:endParaRPr lang="en-US" sz="1400" dirty="0"/>
+            <a:endParaRPr lang="en-US" sz="2000" dirty="0">
+              <a:solidFill>
+                <a:schemeClr val="bg1"/>
+              </a:solidFill>
+            </a:endParaRPr>
           </a:p>
         </p:txBody>
       </p:sp>
@@ -7957,7 +7840,7 @@
           <a:bodyPr wrap="square" lIns="0" tIns="0" rIns="0" bIns="0" rtlCol="0" anchor="ctr"/>
           <a:lstStyle/>
           <a:p>
-            <a:pPr indent="0" marL="0">
+            <a:pPr marL="0" indent="0">
               <a:buNone/>
             </a:pPr>
             <a:r>
@@ -8023,16 +7906,16 @@
           <a:bodyPr wrap="square" lIns="0" tIns="0" rIns="0" bIns="0" rtlCol="0" anchor="ctr"/>
           <a:lstStyle/>
           <a:p>
-            <a:pPr indent="0" marL="0">
+            <a:pPr marL="0" indent="0">
               <a:lnSpc>
                 <a:spcPct val="110000"/>
               </a:lnSpc>
               <a:buNone/>
             </a:pPr>
             <a:r>
-              <a:rPr lang="en-US" sz="1400" dirty="0">
-                <a:solidFill>
-                  <a:srgbClr val="4FD1E0"/>
+              <a:rPr lang="en-US" sz="2000" dirty="0">
+                <a:solidFill>
+                  <a:schemeClr val="bg1"/>
                 </a:solidFill>
                 <a:latin typeface="Consolas" pitchFamily="34" charset="0"/>
                 <a:ea typeface="Consolas" pitchFamily="34" charset="-122"/>
@@ -8040,7 +7923,11 @@
               </a:rPr>
               <a:t>Сумма цифр: 16</a:t>
             </a:r>
-            <a:endParaRPr lang="en-US" sz="1400" dirty="0"/>
+            <a:endParaRPr lang="en-US" sz="2000" dirty="0">
+              <a:solidFill>
+                <a:schemeClr val="bg1"/>
+              </a:solidFill>
+            </a:endParaRPr>
           </a:p>
         </p:txBody>
       </p:sp>
@@ -8065,13 +7952,13 @@
           <a:bodyPr wrap="square" lIns="0" tIns="0" rIns="0" bIns="0" rtlCol="0" anchor="ctr"/>
           <a:lstStyle/>
           <a:p>
-            <a:pPr indent="0" marL="0">
-              <a:buNone/>
-            </a:pPr>
-            <a:r>
-              <a:rPr lang="en-US" sz="1300" i="1" dirty="0">
-                <a:solidFill>
-                  <a:srgbClr val="A9A3C4"/>
+            <a:pPr marL="0" indent="0">
+              <a:buNone/>
+            </a:pPr>
+            <a:r>
+              <a:rPr lang="en-US" sz="2000" i="1" dirty="0">
+                <a:solidFill>
+                  <a:schemeClr val="bg1"/>
                 </a:solidFill>
                 <a:latin typeface="Calibri" pitchFamily="34" charset="0"/>
                 <a:ea typeface="Calibri" pitchFamily="34" charset="-122"/>
@@ -8079,7 +7966,11 @@
               </a:rPr>
               <a:t>Сотни: n // 100. Десятки: n // 10 % 10. Единицы: n % 10.</a:t>
             </a:r>
-            <a:endParaRPr lang="en-US" sz="1300" dirty="0"/>
+            <a:endParaRPr lang="en-US" sz="2000" dirty="0">
+              <a:solidFill>
+                <a:schemeClr val="bg1"/>
+              </a:solidFill>
+            </a:endParaRPr>
           </a:p>
         </p:txBody>
       </p:sp>
@@ -8151,7 +8042,7 @@
           <a:bodyPr wrap="square" lIns="0" tIns="0" rIns="0" bIns="0" rtlCol="0" anchor="ctr"/>
           <a:lstStyle/>
           <a:p>
-            <a:pPr algn="ctr" indent="0" marL="0">
+            <a:pPr marL="0" indent="0" algn="ctr">
               <a:buNone/>
             </a:pPr>
             <a:r>
@@ -8190,7 +8081,7 @@
           <a:bodyPr wrap="square" lIns="0" tIns="0" rIns="0" bIns="0" rtlCol="0" anchor="ctr"/>
           <a:lstStyle/>
           <a:p>
-            <a:pPr indent="0" marL="0">
+            <a:pPr marL="0" indent="0">
               <a:buNone/>
             </a:pPr>
             <a:r>
@@ -8229,7 +8120,7 @@
           <a:bodyPr wrap="square" lIns="0" tIns="0" rIns="0" bIns="0" rtlCol="0" anchor="ctr"/>
           <a:lstStyle/>
           <a:p>
-            <a:pPr indent="0" marL="0">
+            <a:pPr marL="0" indent="0">
               <a:buNone/>
             </a:pPr>
             <a:r>
@@ -8268,7 +8159,7 @@
           <a:bodyPr wrap="square" lIns="0" tIns="0" rIns="0" bIns="0" rtlCol="0" anchor="ctr"/>
           <a:lstStyle/>
           <a:p>
-            <a:pPr indent="0" marL="0">
+            <a:pPr marL="0" indent="0">
               <a:buNone/>
             </a:pPr>
             <a:r>
@@ -8334,16 +8225,16 @@
           <a:bodyPr wrap="square" lIns="0" tIns="0" rIns="0" bIns="0" rtlCol="0" anchor="ctr"/>
           <a:lstStyle/>
           <a:p>
-            <a:pPr indent="0" marL="0">
+            <a:pPr marL="0" indent="0">
               <a:lnSpc>
                 <a:spcPct val="110000"/>
               </a:lnSpc>
               <a:buNone/>
             </a:pPr>
             <a:r>
-              <a:rPr lang="en-US" sz="1400" dirty="0">
-                <a:solidFill>
-                  <a:srgbClr val="4FD1E0"/>
+              <a:rPr lang="en-US" sz="2000" dirty="0">
+                <a:solidFill>
+                  <a:schemeClr val="bg1"/>
                 </a:solidFill>
                 <a:latin typeface="Consolas" pitchFamily="34" charset="0"/>
                 <a:ea typeface="Consolas" pitchFamily="34" charset="-122"/>
@@ -8351,7 +8242,11 @@
               </a:rPr>
               <a:t>sek = 3725</a:t>
             </a:r>
-            <a:endParaRPr lang="en-US" sz="1400" dirty="0"/>
+            <a:endParaRPr lang="en-US" sz="2000" dirty="0">
+              <a:solidFill>
+                <a:schemeClr val="bg1"/>
+              </a:solidFill>
+            </a:endParaRPr>
           </a:p>
         </p:txBody>
       </p:sp>
@@ -8376,7 +8271,7 @@
           <a:bodyPr wrap="square" lIns="0" tIns="0" rIns="0" bIns="0" rtlCol="0" anchor="ctr"/>
           <a:lstStyle/>
           <a:p>
-            <a:pPr indent="0" marL="0">
+            <a:pPr marL="0" indent="0">
               <a:buNone/>
             </a:pPr>
             <a:r>
@@ -8442,16 +8337,16 @@
           <a:bodyPr wrap="square" lIns="0" tIns="0" rIns="0" bIns="0" rtlCol="0" anchor="ctr"/>
           <a:lstStyle/>
           <a:p>
-            <a:pPr indent="0" marL="0">
+            <a:pPr marL="0" indent="0">
               <a:lnSpc>
                 <a:spcPct val="110000"/>
               </a:lnSpc>
               <a:buNone/>
             </a:pPr>
             <a:r>
-              <a:rPr lang="en-US" sz="1400" dirty="0">
-                <a:solidFill>
-                  <a:srgbClr val="4FD1E0"/>
+              <a:rPr lang="en-US" sz="2000" dirty="0">
+                <a:solidFill>
+                  <a:schemeClr val="bg1"/>
                 </a:solidFill>
                 <a:latin typeface="Consolas" pitchFamily="34" charset="0"/>
                 <a:ea typeface="Consolas" pitchFamily="34" charset="-122"/>
@@ -8459,7 +8354,11 @@
               </a:rPr>
               <a:t>1 ч 2 мин 5 с</a:t>
             </a:r>
-            <a:endParaRPr lang="en-US" sz="1400" dirty="0"/>
+            <a:endParaRPr lang="en-US" sz="2000" dirty="0">
+              <a:solidFill>
+                <a:schemeClr val="bg1"/>
+              </a:solidFill>
+            </a:endParaRPr>
           </a:p>
         </p:txBody>
       </p:sp>
@@ -8484,13 +8383,13 @@
           <a:bodyPr wrap="square" lIns="0" tIns="0" rIns="0" bIns="0" rtlCol="0" anchor="ctr"/>
           <a:lstStyle/>
           <a:p>
-            <a:pPr indent="0" marL="0">
-              <a:buNone/>
-            </a:pPr>
-            <a:r>
-              <a:rPr lang="en-US" sz="1300" i="1" dirty="0">
-                <a:solidFill>
-                  <a:srgbClr val="A9A3C4"/>
+            <a:pPr marL="0" indent="0">
+              <a:buNone/>
+            </a:pPr>
+            <a:r>
+              <a:rPr lang="en-US" sz="2000" b="1" i="1" dirty="0">
+                <a:solidFill>
+                  <a:schemeClr val="bg1"/>
                 </a:solidFill>
                 <a:latin typeface="Calibri" pitchFamily="34" charset="0"/>
                 <a:ea typeface="Calibri" pitchFamily="34" charset="-122"/>
@@ -8498,7 +8397,11 @@
               </a:rPr>
               <a:t>Минуты: остаток от деления на 3600, затем разделить на 60.</a:t>
             </a:r>
-            <a:endParaRPr lang="en-US" sz="1300" dirty="0"/>
+            <a:endParaRPr lang="en-US" sz="2000" b="1" dirty="0">
+              <a:solidFill>
+                <a:schemeClr val="bg1"/>
+              </a:solidFill>
+            </a:endParaRPr>
           </a:p>
         </p:txBody>
       </p:sp>
@@ -8518,6 +8421,7 @@
         <a:solidFill>
           <a:srgbClr val="17132E"/>
         </a:solidFill>
+        <a:effectLst/>
       </p:bgPr>
     </p:bg>
     <p:spTree>
@@ -8577,11 +8481,11 @@
           <a:bodyPr wrap="square" lIns="0" tIns="0" rIns="0" bIns="0" rtlCol="0" anchor="ctr"/>
           <a:lstStyle/>
           <a:p>
-            <a:pPr algn="ctr" indent="0" marL="0">
-              <a:buNone/>
-            </a:pPr>
-            <a:r>
-              <a:rPr lang="en-US" sz="1600" b="1" spc="100" kern="0" dirty="0">
+            <a:pPr marL="0" indent="0" algn="ctr">
+              <a:buNone/>
+            </a:pPr>
+            <a:r>
+              <a:rPr lang="en-US" sz="1600" b="1" kern="0" spc="100" dirty="0">
                 <a:solidFill>
                   <a:srgbClr val="17132E"/>
                 </a:solidFill>
@@ -8616,7 +8520,7 @@
           <a:bodyPr wrap="square" lIns="0" tIns="0" rIns="0" bIns="0" rtlCol="0" anchor="ctr"/>
           <a:lstStyle/>
           <a:p>
-            <a:pPr indent="0" marL="0">
+            <a:pPr marL="0" indent="0">
               <a:buNone/>
             </a:pPr>
             <a:r>
@@ -8682,7 +8586,7 @@
           <a:bodyPr wrap="square" lIns="0" tIns="0" rIns="0" bIns="0" rtlCol="0" anchor="ctr"/>
           <a:lstStyle/>
           <a:p>
-            <a:pPr algn="ctr" indent="0" marL="0">
+            <a:pPr marL="0" indent="0" algn="ctr">
               <a:buNone/>
             </a:pPr>
             <a:r>
@@ -8768,7 +8672,7 @@
           <a:bodyPr wrap="square" lIns="0" tIns="0" rIns="0" bIns="0" rtlCol="0" anchor="ctr"/>
           <a:lstStyle/>
           <a:p>
-            <a:pPr algn="ctr" indent="0" marL="0">
+            <a:pPr marL="0" indent="0" algn="ctr">
               <a:buNone/>
             </a:pPr>
             <a:r>
@@ -8807,7 +8711,7 @@
           <a:bodyPr wrap="square" lIns="0" tIns="0" rIns="0" bIns="0" rtlCol="0" anchor="ctr"/>
           <a:lstStyle/>
           <a:p>
-            <a:pPr indent="0" marL="0">
+            <a:pPr marL="0" indent="0">
               <a:buNone/>
             </a:pPr>
             <a:r>
@@ -8846,11 +8750,11 @@
           <a:bodyPr wrap="square" lIns="0" tIns="0" rIns="0" bIns="0" rtlCol="0" anchor="ctr"/>
           <a:lstStyle/>
           <a:p>
-            <a:pPr indent="0" marL="0">
-              <a:buNone/>
-            </a:pPr>
-            <a:r>
-              <a:rPr lang="en-US" sz="1500" dirty="0">
+            <a:pPr marL="0" indent="0">
+              <a:buNone/>
+            </a:pPr>
+            <a:r>
+              <a:rPr lang="en-US" sz="2000" dirty="0">
                 <a:solidFill>
                   <a:srgbClr val="FFFFFF"/>
                 </a:solidFill>
@@ -8860,7 +8764,7 @@
               </a:rPr>
               <a:t>Две переменные. Поменяй их значения местами, не заводя третью переменную и не применяя запись a, b = b, a.</a:t>
             </a:r>
-            <a:endParaRPr lang="en-US" sz="1500" dirty="0"/>
+            <a:endParaRPr lang="en-US" sz="2000" dirty="0"/>
           </a:p>
         </p:txBody>
       </p:sp>
@@ -8885,7 +8789,7 @@
           <a:bodyPr wrap="square" lIns="0" tIns="0" rIns="0" bIns="0" rtlCol="0" anchor="ctr"/>
           <a:lstStyle/>
           <a:p>
-            <a:pPr indent="0" marL="0">
+            <a:pPr marL="0" indent="0">
               <a:buNone/>
             </a:pPr>
             <a:r>
@@ -8951,16 +8855,16 @@
           <a:bodyPr wrap="square" lIns="0" tIns="0" rIns="0" bIns="0" rtlCol="0" anchor="ctr"/>
           <a:lstStyle/>
           <a:p>
-            <a:pPr indent="0" marL="0">
+            <a:pPr marL="0" indent="0">
               <a:lnSpc>
                 <a:spcPct val="110000"/>
               </a:lnSpc>
               <a:buNone/>
             </a:pPr>
             <a:r>
-              <a:rPr lang="en-US" sz="1400" dirty="0">
-                <a:solidFill>
-                  <a:srgbClr val="4FD1E0"/>
+              <a:rPr lang="en-US" sz="2000" dirty="0">
+                <a:solidFill>
+                  <a:schemeClr val="bg1"/>
                 </a:solidFill>
                 <a:latin typeface="Consolas" pitchFamily="34" charset="0"/>
                 <a:ea typeface="Consolas" pitchFamily="34" charset="-122"/>
@@ -8968,19 +8872,23 @@
               </a:rPr>
               <a:t>a = 7</a:t>
             </a:r>
-            <a:endParaRPr lang="en-US" sz="1400" dirty="0"/>
-          </a:p>
-          <a:p>
-            <a:pPr indent="0" marL="0">
+            <a:endParaRPr lang="en-US" sz="2000" dirty="0">
+              <a:solidFill>
+                <a:schemeClr val="bg1"/>
+              </a:solidFill>
+            </a:endParaRPr>
+          </a:p>
+          <a:p>
+            <a:pPr marL="0" indent="0">
               <a:lnSpc>
                 <a:spcPct val="110000"/>
               </a:lnSpc>
               <a:buNone/>
             </a:pPr>
             <a:r>
-              <a:rPr lang="en-US" sz="1400" dirty="0">
-                <a:solidFill>
-                  <a:srgbClr val="4FD1E0"/>
+              <a:rPr lang="en-US" sz="2000" dirty="0">
+                <a:solidFill>
+                  <a:schemeClr val="bg1"/>
                 </a:solidFill>
                 <a:latin typeface="Consolas" pitchFamily="34" charset="0"/>
                 <a:ea typeface="Consolas" pitchFamily="34" charset="-122"/>
@@ -8988,7 +8896,11 @@
               </a:rPr>
               <a:t>b = 3</a:t>
             </a:r>
-            <a:endParaRPr lang="en-US" sz="1400" dirty="0"/>
+            <a:endParaRPr lang="en-US" sz="2000" dirty="0">
+              <a:solidFill>
+                <a:schemeClr val="bg1"/>
+              </a:solidFill>
+            </a:endParaRPr>
           </a:p>
         </p:txBody>
       </p:sp>
@@ -9013,7 +8925,7 @@
           <a:bodyPr wrap="square" lIns="0" tIns="0" rIns="0" bIns="0" rtlCol="0" anchor="ctr"/>
           <a:lstStyle/>
           <a:p>
-            <a:pPr indent="0" marL="0">
+            <a:pPr marL="0" indent="0">
               <a:buNone/>
             </a:pPr>
             <a:r>
@@ -9079,16 +8991,16 @@
           <a:bodyPr wrap="square" lIns="0" tIns="0" rIns="0" bIns="0" rtlCol="0" anchor="ctr"/>
           <a:lstStyle/>
           <a:p>
-            <a:pPr indent="0" marL="0">
+            <a:pPr marL="0" indent="0">
               <a:lnSpc>
                 <a:spcPct val="110000"/>
               </a:lnSpc>
               <a:buNone/>
             </a:pPr>
             <a:r>
-              <a:rPr lang="en-US" sz="1400" dirty="0">
-                <a:solidFill>
-                  <a:srgbClr val="4FD1E0"/>
+              <a:rPr lang="en-US" sz="2000" dirty="0">
+                <a:solidFill>
+                  <a:schemeClr val="bg1"/>
                 </a:solidFill>
                 <a:latin typeface="Consolas" pitchFamily="34" charset="0"/>
                 <a:ea typeface="Consolas" pitchFamily="34" charset="-122"/>
@@ -9096,19 +9008,23 @@
               </a:rPr>
               <a:t>a = 3</a:t>
             </a:r>
-            <a:endParaRPr lang="en-US" sz="1400" dirty="0"/>
-          </a:p>
-          <a:p>
-            <a:pPr indent="0" marL="0">
+            <a:endParaRPr lang="en-US" sz="2000" dirty="0">
+              <a:solidFill>
+                <a:schemeClr val="bg1"/>
+              </a:solidFill>
+            </a:endParaRPr>
+          </a:p>
+          <a:p>
+            <a:pPr marL="0" indent="0">
               <a:lnSpc>
                 <a:spcPct val="110000"/>
               </a:lnSpc>
               <a:buNone/>
             </a:pPr>
             <a:r>
-              <a:rPr lang="en-US" sz="1400" dirty="0">
-                <a:solidFill>
-                  <a:srgbClr val="4FD1E0"/>
+              <a:rPr lang="en-US" sz="2000" dirty="0">
+                <a:solidFill>
+                  <a:schemeClr val="bg1"/>
                 </a:solidFill>
                 <a:latin typeface="Consolas" pitchFamily="34" charset="0"/>
                 <a:ea typeface="Consolas" pitchFamily="34" charset="-122"/>
@@ -9116,7 +9032,11 @@
               </a:rPr>
               <a:t>b = 7</a:t>
             </a:r>
-            <a:endParaRPr lang="en-US" sz="1400" dirty="0"/>
+            <a:endParaRPr lang="en-US" sz="2000" dirty="0">
+              <a:solidFill>
+                <a:schemeClr val="bg1"/>
+              </a:solidFill>
+            </a:endParaRPr>
           </a:p>
         </p:txBody>
       </p:sp>
@@ -9141,7 +9061,7 @@
           <a:bodyPr wrap="square" lIns="0" tIns="0" rIns="0" bIns="0" rtlCol="0" anchor="ctr"/>
           <a:lstStyle/>
           <a:p>
-            <a:pPr indent="0" marL="0">
+            <a:pPr marL="0" indent="0">
               <a:buNone/>
             </a:pPr>
             <a:r>
@@ -9227,7 +9147,7 @@
           <a:bodyPr wrap="square" lIns="0" tIns="0" rIns="0" bIns="0" rtlCol="0" anchor="ctr"/>
           <a:lstStyle/>
           <a:p>
-            <a:pPr algn="ctr" indent="0" marL="0">
+            <a:pPr marL="0" indent="0" algn="ctr">
               <a:buNone/>
             </a:pPr>
             <a:r>
@@ -9266,7 +9186,7 @@
           <a:bodyPr wrap="square" lIns="0" tIns="0" rIns="0" bIns="0" rtlCol="0" anchor="ctr"/>
           <a:lstStyle/>
           <a:p>
-            <a:pPr indent="0" marL="0">
+            <a:pPr marL="0" indent="0">
               <a:buNone/>
             </a:pPr>
             <a:r>
@@ -9305,11 +9225,11 @@
           <a:bodyPr wrap="square" lIns="0" tIns="0" rIns="0" bIns="0" rtlCol="0" anchor="ctr"/>
           <a:lstStyle/>
           <a:p>
-            <a:pPr indent="0" marL="0">
-              <a:buNone/>
-            </a:pPr>
-            <a:r>
-              <a:rPr lang="en-US" sz="1500" dirty="0">
+            <a:pPr marL="0" indent="0">
+              <a:buNone/>
+            </a:pPr>
+            <a:r>
+              <a:rPr lang="en-US" sz="2000" dirty="0">
                 <a:solidFill>
                   <a:srgbClr val="FFFFFF"/>
                 </a:solidFill>
@@ -9319,7 +9239,7 @@
               </a:rPr>
               <a:t>Дано трёхзначное число. Выведи число, записанное теми же цифрами в обратном порядке.</a:t>
             </a:r>
-            <a:endParaRPr lang="en-US" sz="1500" dirty="0"/>
+            <a:endParaRPr lang="en-US" sz="2000" dirty="0"/>
           </a:p>
         </p:txBody>
       </p:sp>
@@ -9344,7 +9264,7 @@
           <a:bodyPr wrap="square" lIns="0" tIns="0" rIns="0" bIns="0" rtlCol="0" anchor="ctr"/>
           <a:lstStyle/>
           <a:p>
-            <a:pPr indent="0" marL="0">
+            <a:pPr marL="0" indent="0">
               <a:buNone/>
             </a:pPr>
             <a:r>
@@ -9410,16 +9330,16 @@
           <a:bodyPr wrap="square" lIns="0" tIns="0" rIns="0" bIns="0" rtlCol="0" anchor="ctr"/>
           <a:lstStyle/>
           <a:p>
-            <a:pPr indent="0" marL="0">
+            <a:pPr marL="0" indent="0">
               <a:lnSpc>
                 <a:spcPct val="110000"/>
               </a:lnSpc>
               <a:buNone/>
             </a:pPr>
             <a:r>
-              <a:rPr lang="en-US" sz="1400" dirty="0">
-                <a:solidFill>
-                  <a:srgbClr val="4FD1E0"/>
+              <a:rPr lang="en-US" sz="2000" dirty="0">
+                <a:solidFill>
+                  <a:schemeClr val="bg1"/>
                 </a:solidFill>
                 <a:latin typeface="Consolas" pitchFamily="34" charset="0"/>
                 <a:ea typeface="Consolas" pitchFamily="34" charset="-122"/>
@@ -9427,7 +9347,11 @@
               </a:rPr>
               <a:t>n = 385</a:t>
             </a:r>
-            <a:endParaRPr lang="en-US" sz="1400" dirty="0"/>
+            <a:endParaRPr lang="en-US" sz="2000" dirty="0">
+              <a:solidFill>
+                <a:schemeClr val="bg1"/>
+              </a:solidFill>
+            </a:endParaRPr>
           </a:p>
         </p:txBody>
       </p:sp>
@@ -9452,7 +9376,7 @@
           <a:bodyPr wrap="square" lIns="0" tIns="0" rIns="0" bIns="0" rtlCol="0" anchor="ctr"/>
           <a:lstStyle/>
           <a:p>
-            <a:pPr indent="0" marL="0">
+            <a:pPr marL="0" indent="0">
               <a:buNone/>
             </a:pPr>
             <a:r>
@@ -9518,16 +9442,16 @@
           <a:bodyPr wrap="square" lIns="0" tIns="0" rIns="0" bIns="0" rtlCol="0" anchor="ctr"/>
           <a:lstStyle/>
           <a:p>
-            <a:pPr indent="0" marL="0">
+            <a:pPr marL="0" indent="0">
               <a:lnSpc>
                 <a:spcPct val="110000"/>
               </a:lnSpc>
               <a:buNone/>
             </a:pPr>
             <a:r>
-              <a:rPr lang="en-US" sz="1400" dirty="0">
-                <a:solidFill>
-                  <a:srgbClr val="4FD1E0"/>
+              <a:rPr lang="en-US" sz="2000" dirty="0">
+                <a:solidFill>
+                  <a:schemeClr val="bg1"/>
                 </a:solidFill>
                 <a:latin typeface="Consolas" pitchFamily="34" charset="0"/>
                 <a:ea typeface="Consolas" pitchFamily="34" charset="-122"/>
@@ -9535,7 +9459,11 @@
               </a:rPr>
               <a:t>Наоборот: 583</a:t>
             </a:r>
-            <a:endParaRPr lang="en-US" sz="1400" dirty="0"/>
+            <a:endParaRPr lang="en-US" sz="2000" dirty="0">
+              <a:solidFill>
+                <a:schemeClr val="bg1"/>
+              </a:solidFill>
+            </a:endParaRPr>
           </a:p>
         </p:txBody>
       </p:sp>
@@ -9560,7 +9488,7 @@
           <a:bodyPr wrap="square" lIns="0" tIns="0" rIns="0" bIns="0" rtlCol="0" anchor="ctr"/>
           <a:lstStyle/>
           <a:p>
-            <a:pPr indent="0" marL="0">
+            <a:pPr marL="0" indent="0">
               <a:buNone/>
             </a:pPr>
             <a:r>
@@ -9594,6 +9522,7 @@
         <a:solidFill>
           <a:srgbClr val="17132E"/>
         </a:solidFill>
+        <a:effectLst/>
       </p:bgPr>
     </p:bg>
     <p:spTree>
@@ -9653,11 +9582,11 @@
           <a:bodyPr wrap="square" lIns="0" tIns="0" rIns="0" bIns="0" rtlCol="0" anchor="ctr"/>
           <a:lstStyle/>
           <a:p>
-            <a:pPr algn="ctr" indent="0" marL="0">
-              <a:buNone/>
-            </a:pPr>
-            <a:r>
-              <a:rPr lang="en-US" sz="1600" b="1" spc="100" kern="0" dirty="0">
+            <a:pPr marL="0" indent="0" algn="ctr">
+              <a:buNone/>
+            </a:pPr>
+            <a:r>
+              <a:rPr lang="en-US" sz="1600" b="1" kern="0" spc="100" dirty="0">
                 <a:solidFill>
                   <a:srgbClr val="17132E"/>
                 </a:solidFill>
@@ -9692,7 +9621,7 @@
           <a:bodyPr wrap="square" lIns="0" tIns="0" rIns="0" bIns="0" rtlCol="0" anchor="ctr"/>
           <a:lstStyle/>
           <a:p>
-            <a:pPr indent="0" marL="0">
+            <a:pPr marL="0" indent="0">
               <a:buNone/>
             </a:pPr>
             <a:r>
@@ -9758,7 +9687,7 @@
           <a:bodyPr wrap="square" lIns="0" tIns="0" rIns="0" bIns="0" rtlCol="0" anchor="ctr"/>
           <a:lstStyle/>
           <a:p>
-            <a:pPr algn="ctr" indent="0" marL="0">
+            <a:pPr marL="0" indent="0" algn="ctr">
               <a:buNone/>
             </a:pPr>
             <a:r>
@@ -9844,7 +9773,7 @@
           <a:bodyPr wrap="square" lIns="0" tIns="0" rIns="0" bIns="0" rtlCol="0" anchor="ctr"/>
           <a:lstStyle/>
           <a:p>
-            <a:pPr algn="ctr" indent="0" marL="0">
+            <a:pPr marL="0" indent="0" algn="ctr">
               <a:buNone/>
             </a:pPr>
             <a:r>
@@ -9883,7 +9812,7 @@
           <a:bodyPr wrap="square" lIns="0" tIns="0" rIns="0" bIns="0" rtlCol="0" anchor="ctr"/>
           <a:lstStyle/>
           <a:p>
-            <a:pPr indent="0" marL="0">
+            <a:pPr marL="0" indent="0">
               <a:buNone/>
             </a:pPr>
             <a:r>
@@ -9922,7 +9851,7 @@
           <a:bodyPr wrap="square" lIns="0" tIns="0" rIns="0" bIns="0" rtlCol="0" anchor="ctr"/>
           <a:lstStyle/>
           <a:p>
-            <a:pPr indent="0" marL="0">
+            <a:pPr marL="0" indent="0">
               <a:buNone/>
             </a:pPr>
             <a:r>
@@ -9961,7 +9890,7 @@
           <a:bodyPr wrap="square" lIns="0" tIns="0" rIns="0" bIns="0" rtlCol="0" anchor="ctr"/>
           <a:lstStyle/>
           <a:p>
-            <a:pPr indent="0" marL="0">
+            <a:pPr marL="0" indent="0">
               <a:buNone/>
             </a:pPr>
             <a:r>
@@ -10027,7 +9956,7 @@
           <a:bodyPr wrap="square" lIns="0" tIns="0" rIns="0" bIns="0" rtlCol="0" anchor="ctr"/>
           <a:lstStyle/>
           <a:p>
-            <a:pPr indent="0" marL="0">
+            <a:pPr marL="0" indent="0">
               <a:lnSpc>
                 <a:spcPct val="110000"/>
               </a:lnSpc>
@@ -10047,7 +9976,7 @@
             <a:endParaRPr lang="en-US" sz="1400" dirty="0"/>
           </a:p>
           <a:p>
-            <a:pPr indent="0" marL="0">
+            <a:pPr marL="0" indent="0">
               <a:lnSpc>
                 <a:spcPct val="110000"/>
               </a:lnSpc>
@@ -10089,7 +10018,7 @@
           <a:bodyPr wrap="square" lIns="0" tIns="0" rIns="0" bIns="0" rtlCol="0" anchor="ctr"/>
           <a:lstStyle/>
           <a:p>
-            <a:pPr indent="0" marL="0">
+            <a:pPr marL="0" indent="0">
               <a:buNone/>
             </a:pPr>
             <a:r>
@@ -10155,7 +10084,7 @@
           <a:bodyPr wrap="square" lIns="0" tIns="0" rIns="0" bIns="0" rtlCol="0" anchor="ctr"/>
           <a:lstStyle/>
           <a:p>
-            <a:pPr indent="0" marL="0">
+            <a:pPr marL="0" indent="0">
               <a:lnSpc>
                 <a:spcPct val="110000"/>
               </a:lnSpc>
@@ -10197,7 +10126,7 @@
           <a:bodyPr wrap="square" lIns="0" tIns="0" rIns="0" bIns="0" rtlCol="0" anchor="ctr"/>
           <a:lstStyle/>
           <a:p>
-            <a:pPr indent="0" marL="0">
+            <a:pPr marL="0" indent="0">
               <a:buNone/>
             </a:pPr>
             <a:r>
@@ -10283,7 +10212,7 @@
           <a:bodyPr wrap="square" lIns="0" tIns="0" rIns="0" bIns="0" rtlCol="0" anchor="ctr"/>
           <a:lstStyle/>
           <a:p>
-            <a:pPr algn="ctr" indent="0" marL="0">
+            <a:pPr marL="0" indent="0" algn="ctr">
               <a:buNone/>
             </a:pPr>
             <a:r>
@@ -10322,7 +10251,7 @@
           <a:bodyPr wrap="square" lIns="0" tIns="0" rIns="0" bIns="0" rtlCol="0" anchor="ctr"/>
           <a:lstStyle/>
           <a:p>
-            <a:pPr indent="0" marL="0">
+            <a:pPr marL="0" indent="0">
               <a:buNone/>
             </a:pPr>
             <a:r>
@@ -10361,7 +10290,7 @@
           <a:bodyPr wrap="square" lIns="0" tIns="0" rIns="0" bIns="0" rtlCol="0" anchor="ctr"/>
           <a:lstStyle/>
           <a:p>
-            <a:pPr indent="0" marL="0">
+            <a:pPr marL="0" indent="0">
               <a:buNone/>
             </a:pPr>
             <a:r>
@@ -10400,7 +10329,7 @@
           <a:bodyPr wrap="square" lIns="0" tIns="0" rIns="0" bIns="0" rtlCol="0" anchor="ctr"/>
           <a:lstStyle/>
           <a:p>
-            <a:pPr indent="0" marL="0">
+            <a:pPr marL="0" indent="0">
               <a:buNone/>
             </a:pPr>
             <a:r>
@@ -10466,7 +10395,7 @@
           <a:bodyPr wrap="square" lIns="0" tIns="0" rIns="0" bIns="0" rtlCol="0" anchor="ctr"/>
           <a:lstStyle/>
           <a:p>
-            <a:pPr indent="0" marL="0">
+            <a:pPr marL="0" indent="0">
               <a:lnSpc>
                 <a:spcPct val="110000"/>
               </a:lnSpc>
@@ -10508,7 +10437,7 @@
           <a:bodyPr wrap="square" lIns="0" tIns="0" rIns="0" bIns="0" rtlCol="0" anchor="ctr"/>
           <a:lstStyle/>
           <a:p>
-            <a:pPr indent="0" marL="0">
+            <a:pPr marL="0" indent="0">
               <a:buNone/>
             </a:pPr>
             <a:r>
@@ -10574,7 +10503,7 @@
           <a:bodyPr wrap="square" lIns="0" tIns="0" rIns="0" bIns="0" rtlCol="0" anchor="ctr"/>
           <a:lstStyle/>
           <a:p>
-            <a:pPr indent="0" marL="0">
+            <a:pPr marL="0" indent="0">
               <a:lnSpc>
                 <a:spcPct val="110000"/>
               </a:lnSpc>
@@ -10616,7 +10545,7 @@
           <a:bodyPr wrap="square" lIns="0" tIns="0" rIns="0" bIns="0" rtlCol="0" anchor="ctr"/>
           <a:lstStyle/>
           <a:p>
-            <a:pPr indent="0" marL="0">
+            <a:pPr marL="0" indent="0">
               <a:buNone/>
             </a:pPr>
             <a:r>
@@ -10650,6 +10579,7 @@
         <a:solidFill>
           <a:srgbClr val="17132E"/>
         </a:solidFill>
+        <a:effectLst/>
       </p:bgPr>
     </p:bg>
     <p:spTree>
@@ -10687,7 +10617,7 @@
           <a:bodyPr wrap="square" lIns="0" tIns="0" rIns="0" bIns="0" rtlCol="0" anchor="ctr"/>
           <a:lstStyle/>
           <a:p>
-            <a:pPr indent="0" marL="0">
+            <a:pPr marL="0" indent="0">
               <a:buNone/>
             </a:pPr>
             <a:r>
@@ -10726,7 +10656,7 @@
           <a:bodyPr wrap="square" lIns="0" tIns="0" rIns="0" bIns="0" rtlCol="0" anchor="ctr"/>
           <a:lstStyle/>
           <a:p>
-            <a:pPr indent="0" marL="0">
+            <a:pPr marL="0" indent="0">
               <a:buNone/>
             </a:pPr>
             <a:r>
@@ -10765,7 +10695,7 @@
           <a:bodyPr wrap="square" lIns="0" tIns="0" rIns="0" bIns="0" rtlCol="0" anchor="ctr"/>
           <a:lstStyle/>
           <a:p>
-            <a:pPr indent="0" marL="0">
+            <a:pPr marL="0" indent="0">
               <a:buNone/>
             </a:pPr>
             <a:r>
@@ -10831,7 +10761,7 @@
           <a:bodyPr wrap="square" lIns="0" tIns="0" rIns="0" bIns="0" rtlCol="0" anchor="ctr"/>
           <a:lstStyle/>
           <a:p>
-            <a:pPr indent="0" marL="0">
+            <a:pPr marL="0" indent="0">
               <a:lnSpc>
                 <a:spcPct val="110000"/>
               </a:lnSpc>
@@ -10851,7 +10781,7 @@
             <a:endParaRPr lang="en-US" sz="1500" dirty="0"/>
           </a:p>
           <a:p>
-            <a:pPr indent="0" marL="0">
+            <a:pPr marL="0" indent="0">
               <a:lnSpc>
                 <a:spcPct val="110000"/>
               </a:lnSpc>
@@ -10871,7 +10801,7 @@
             <a:endParaRPr lang="en-US" sz="1500" dirty="0"/>
           </a:p>
           <a:p>
-            <a:pPr indent="0" marL="0">
+            <a:pPr marL="0" indent="0">
               <a:lnSpc>
                 <a:spcPct val="110000"/>
               </a:lnSpc>
@@ -10891,7 +10821,7 @@
             <a:endParaRPr lang="en-US" sz="1500" dirty="0"/>
           </a:p>
           <a:p>
-            <a:pPr indent="0" marL="0">
+            <a:pPr marL="0" indent="0">
               <a:lnSpc>
                 <a:spcPct val="110000"/>
               </a:lnSpc>
@@ -10933,7 +10863,7 @@
           <a:bodyPr wrap="square" lIns="0" tIns="0" rIns="0" bIns="0" rtlCol="0" anchor="ctr"/>
           <a:lstStyle/>
           <a:p>
-            <a:pPr indent="0" marL="0">
+            <a:pPr marL="0" indent="0">
               <a:buNone/>
             </a:pPr>
             <a:r>
@@ -10972,7 +10902,7 @@
           <a:bodyPr wrap="square" lIns="0" tIns="0" rIns="0" bIns="0" rtlCol="0" anchor="ctr"/>
           <a:lstStyle/>
           <a:p>
-            <a:pPr indent="0" marL="0">
+            <a:pPr marL="0" indent="0">
               <a:buNone/>
             </a:pPr>
             <a:r>
@@ -11038,7 +10968,7 @@
           <a:bodyPr wrap="square" lIns="0" tIns="0" rIns="0" bIns="0" rtlCol="0" anchor="ctr"/>
           <a:lstStyle/>
           <a:p>
-            <a:pPr indent="0" marL="0">
+            <a:pPr marL="0" indent="0">
               <a:lnSpc>
                 <a:spcPct val="110000"/>
               </a:lnSpc>
@@ -11058,7 +10988,7 @@
             <a:endParaRPr lang="en-US" sz="1400" dirty="0"/>
           </a:p>
           <a:p>
-            <a:pPr indent="0" marL="0">
+            <a:pPr marL="0" indent="0">
               <a:lnSpc>
                 <a:spcPct val="110000"/>
               </a:lnSpc>
@@ -11078,7 +11008,7 @@
             <a:endParaRPr lang="en-US" sz="1400" dirty="0"/>
           </a:p>
           <a:p>
-            <a:pPr indent="0" marL="0">
+            <a:pPr marL="0" indent="0">
               <a:lnSpc>
                 <a:spcPct val="110000"/>
               </a:lnSpc>
@@ -11098,7 +11028,7 @@
             <a:endParaRPr lang="en-US" sz="1400" dirty="0"/>
           </a:p>
           <a:p>
-            <a:pPr indent="0" marL="0">
+            <a:pPr marL="0" indent="0">
               <a:lnSpc>
                 <a:spcPct val="110000"/>
               </a:lnSpc>
@@ -11107,7 +11037,7 @@
             <a:endParaRPr lang="en-US" sz="1400" dirty="0"/>
           </a:p>
           <a:p>
-            <a:pPr indent="0" marL="0">
+            <a:pPr marL="0" indent="0">
               <a:lnSpc>
                 <a:spcPct val="110000"/>
               </a:lnSpc>
@@ -11127,7 +11057,7 @@
             <a:endParaRPr lang="en-US" sz="1400" dirty="0"/>
           </a:p>
           <a:p>
-            <a:pPr indent="0" marL="0">
+            <a:pPr marL="0" indent="0">
               <a:lnSpc>
                 <a:spcPct val="110000"/>
               </a:lnSpc>
@@ -11169,7 +11099,7 @@
           <a:bodyPr wrap="square" lIns="0" tIns="0" rIns="0" bIns="0" rtlCol="0" anchor="ctr"/>
           <a:lstStyle/>
           <a:p>
-            <a:pPr indent="0" marL="0">
+            <a:pPr marL="0" indent="0">
               <a:buNone/>
             </a:pPr>
             <a:r>
@@ -11235,7 +11165,7 @@
           <a:bodyPr wrap="square" lIns="0" tIns="0" rIns="0" bIns="0" rtlCol="0" anchor="ctr"/>
           <a:lstStyle/>
           <a:p>
-            <a:pPr algn="ctr" indent="0" marL="0">
+            <a:pPr marL="0" indent="0" algn="ctr">
               <a:buNone/>
             </a:pPr>
             <a:r>
@@ -11274,7 +11204,7 @@
           <a:bodyPr wrap="square" lIns="0" tIns="0" rIns="0" bIns="0" rtlCol="0" anchor="ctr"/>
           <a:lstStyle/>
           <a:p>
-            <a:pPr indent="0" marL="0">
+            <a:pPr marL="0" indent="0">
               <a:buNone/>
             </a:pPr>
             <a:r>
@@ -11313,7 +11243,7 @@
           <a:bodyPr wrap="square" lIns="0" tIns="0" rIns="0" bIns="0" rtlCol="0" anchor="ctr"/>
           <a:lstStyle/>
           <a:p>
-            <a:pPr indent="0" marL="0">
+            <a:pPr marL="0" indent="0">
               <a:buNone/>
             </a:pPr>
             <a:r>
@@ -11379,7 +11309,7 @@
           <a:bodyPr wrap="square" lIns="0" tIns="0" rIns="0" bIns="0" rtlCol="0" anchor="ctr"/>
           <a:lstStyle/>
           <a:p>
-            <a:pPr algn="ctr" indent="0" marL="0">
+            <a:pPr marL="0" indent="0" algn="ctr">
               <a:buNone/>
             </a:pPr>
             <a:r>
@@ -11418,7 +11348,7 @@
           <a:bodyPr wrap="square" lIns="0" tIns="0" rIns="0" bIns="0" rtlCol="0" anchor="ctr"/>
           <a:lstStyle/>
           <a:p>
-            <a:pPr indent="0" marL="0">
+            <a:pPr marL="0" indent="0">
               <a:buNone/>
             </a:pPr>
             <a:r>
@@ -11457,7 +11387,7 @@
           <a:bodyPr wrap="square" lIns="0" tIns="0" rIns="0" bIns="0" rtlCol="0" anchor="ctr"/>
           <a:lstStyle/>
           <a:p>
-            <a:pPr indent="0" marL="0">
+            <a:pPr marL="0" indent="0">
               <a:buNone/>
             </a:pPr>
             <a:r>
@@ -11523,7 +11453,7 @@
           <a:bodyPr wrap="square" lIns="0" tIns="0" rIns="0" bIns="0" rtlCol="0" anchor="ctr"/>
           <a:lstStyle/>
           <a:p>
-            <a:pPr algn="ctr" indent="0" marL="0">
+            <a:pPr marL="0" indent="0" algn="ctr">
               <a:buNone/>
             </a:pPr>
             <a:r>
@@ -11562,7 +11492,7 @@
           <a:bodyPr wrap="square" lIns="0" tIns="0" rIns="0" bIns="0" rtlCol="0" anchor="ctr"/>
           <a:lstStyle/>
           <a:p>
-            <a:pPr indent="0" marL="0">
+            <a:pPr marL="0" indent="0">
               <a:buNone/>
             </a:pPr>
             <a:r>
@@ -11601,7 +11531,7 @@
           <a:bodyPr wrap="square" lIns="0" tIns="0" rIns="0" bIns="0" rtlCol="0" anchor="ctr"/>
           <a:lstStyle/>
           <a:p>
-            <a:pPr indent="0" marL="0">
+            <a:pPr marL="0" indent="0">
               <a:buNone/>
             </a:pPr>
             <a:r>
@@ -11667,7 +11597,7 @@
           <a:bodyPr wrap="square" lIns="0" tIns="0" rIns="0" bIns="0" rtlCol="0" anchor="ctr"/>
           <a:lstStyle/>
           <a:p>
-            <a:pPr algn="ctr" indent="0" marL="0">
+            <a:pPr marL="0" indent="0" algn="ctr">
               <a:buNone/>
             </a:pPr>
             <a:r>
@@ -11706,7 +11636,7 @@
           <a:bodyPr wrap="square" lIns="0" tIns="0" rIns="0" bIns="0" rtlCol="0" anchor="ctr"/>
           <a:lstStyle/>
           <a:p>
-            <a:pPr indent="0" marL="0">
+            <a:pPr marL="0" indent="0">
               <a:buNone/>
             </a:pPr>
             <a:r>
@@ -11745,7 +11675,7 @@
           <a:bodyPr wrap="square" lIns="0" tIns="0" rIns="0" bIns="0" rtlCol="0" anchor="ctr"/>
           <a:lstStyle/>
           <a:p>
-            <a:pPr indent="0" marL="0">
+            <a:pPr marL="0" indent="0">
               <a:buNone/>
             </a:pPr>
             <a:r>
@@ -11811,7 +11741,7 @@
           <a:bodyPr wrap="square" lIns="0" tIns="0" rIns="0" bIns="0" rtlCol="0" anchor="ctr"/>
           <a:lstStyle/>
           <a:p>
-            <a:pPr algn="ctr" indent="0" marL="0">
+            <a:pPr marL="0" indent="0" algn="ctr">
               <a:buNone/>
             </a:pPr>
             <a:r>
@@ -11850,7 +11780,7 @@
           <a:bodyPr wrap="square" lIns="0" tIns="0" rIns="0" bIns="0" rtlCol="0" anchor="ctr"/>
           <a:lstStyle/>
           <a:p>
-            <a:pPr indent="0" marL="0">
+            <a:pPr marL="0" indent="0">
               <a:buNone/>
             </a:pPr>
             <a:r>
@@ -11889,7 +11819,7 @@
           <a:bodyPr wrap="square" lIns="0" tIns="0" rIns="0" bIns="0" rtlCol="0" anchor="ctr"/>
           <a:lstStyle/>
           <a:p>
-            <a:pPr indent="0" marL="0">
+            <a:pPr marL="0" indent="0">
               <a:buNone/>
             </a:pPr>
             <a:r>
@@ -11955,7 +11885,7 @@
           <a:bodyPr wrap="square" lIns="0" tIns="0" rIns="0" bIns="0" rtlCol="0" anchor="ctr"/>
           <a:lstStyle/>
           <a:p>
-            <a:pPr algn="ctr" indent="0" marL="0">
+            <a:pPr marL="0" indent="0" algn="ctr">
               <a:buNone/>
             </a:pPr>
             <a:r>
@@ -11994,7 +11924,7 @@
           <a:bodyPr wrap="square" lIns="0" tIns="0" rIns="0" bIns="0" rtlCol="0" anchor="ctr"/>
           <a:lstStyle/>
           <a:p>
-            <a:pPr indent="0" marL="0">
+            <a:pPr marL="0" indent="0">
               <a:buNone/>
             </a:pPr>
             <a:r>
@@ -12033,7 +11963,7 @@
           <a:bodyPr wrap="square" lIns="0" tIns="0" rIns="0" bIns="0" rtlCol="0" anchor="ctr"/>
           <a:lstStyle/>
           <a:p>
-            <a:pPr indent="0" marL="0">
+            <a:pPr marL="0" indent="0">
               <a:buNone/>
             </a:pPr>
             <a:r>
@@ -12099,7 +12029,7 @@
           <a:bodyPr wrap="square" lIns="0" tIns="0" rIns="0" bIns="0" rtlCol="0" anchor="ctr"/>
           <a:lstStyle/>
           <a:p>
-            <a:pPr algn="ctr" indent="0" marL="0">
+            <a:pPr marL="0" indent="0" algn="ctr">
               <a:buNone/>
             </a:pPr>
             <a:r>
@@ -12138,7 +12068,7 @@
           <a:bodyPr wrap="square" lIns="0" tIns="0" rIns="0" bIns="0" rtlCol="0" anchor="ctr"/>
           <a:lstStyle/>
           <a:p>
-            <a:pPr indent="0" marL="0">
+            <a:pPr marL="0" indent="0">
               <a:buNone/>
             </a:pPr>
             <a:r>
@@ -12177,7 +12107,7 @@
           <a:bodyPr wrap="square" lIns="0" tIns="0" rIns="0" bIns="0" rtlCol="0" anchor="ctr"/>
           <a:lstStyle/>
           <a:p>
-            <a:pPr indent="0" marL="0">
+            <a:pPr marL="0" indent="0">
               <a:buNone/>
             </a:pPr>
             <a:r>
@@ -12216,7 +12146,7 @@
           <a:bodyPr wrap="square" lIns="0" tIns="0" rIns="0" bIns="0" rtlCol="0" anchor="ctr"/>
           <a:lstStyle/>
           <a:p>
-            <a:pPr indent="0" marL="0">
+            <a:pPr marL="0" indent="0">
               <a:buNone/>
             </a:pPr>
             <a:r>
@@ -12535,4 +12465,299 @@
     </a:ext>
   </a:extLst>
 </a:theme>
+</file>
+
+<file path=ppt/theme/theme2.xml><?xml version="1.0" encoding="utf-8"?>
+<a:theme xmlns:a="http://schemas.openxmlformats.org/drawingml/2006/main" name="Тема Office">
+  <a:themeElements>
+    <a:clrScheme name="Стандартная">
+      <a:dk1>
+        <a:sysClr val="windowText" lastClr="000000"/>
+      </a:dk1>
+      <a:lt1>
+        <a:sysClr val="window" lastClr="FFFFFF"/>
+      </a:lt1>
+      <a:dk2>
+        <a:srgbClr val="44546A"/>
+      </a:dk2>
+      <a:lt2>
+        <a:srgbClr val="E7E6E6"/>
+      </a:lt2>
+      <a:accent1>
+        <a:srgbClr val="4472C4"/>
+      </a:accent1>
+      <a:accent2>
+        <a:srgbClr val="ED7D31"/>
+      </a:accent2>
+      <a:accent3>
+        <a:srgbClr val="A5A5A5"/>
+      </a:accent3>
+      <a:accent4>
+        <a:srgbClr val="FFC000"/>
+      </a:accent4>
+      <a:accent5>
+        <a:srgbClr val="5B9BD5"/>
+      </a:accent5>
+      <a:accent6>
+        <a:srgbClr val="70AD47"/>
+      </a:accent6>
+      <a:hlink>
+        <a:srgbClr val="0563C1"/>
+      </a:hlink>
+      <a:folHlink>
+        <a:srgbClr val="954F72"/>
+      </a:folHlink>
+    </a:clrScheme>
+    <a:fontScheme name="Стандартная">
+      <a:majorFont>
+        <a:latin typeface="Calibri Light" panose="020F0302020204030204"/>
+        <a:ea typeface=""/>
+        <a:cs typeface=""/>
+        <a:font script="Jpan" typeface="游ゴシック Light"/>
+        <a:font script="Hang" typeface="맑은 고딕"/>
+        <a:font script="Hans" typeface="等线 Light"/>
+        <a:font script="Hant" typeface="新細明體"/>
+        <a:font script="Arab" typeface="Times New Roman"/>
+        <a:font script="Hebr" typeface="Times New Roman"/>
+        <a:font script="Thai" typeface="Angsana New"/>
+        <a:font script="Ethi" typeface="Nyala"/>
+        <a:font script="Beng" typeface="Vrinda"/>
+        <a:font script="Gujr" typeface="Shruti"/>
+        <a:font script="Khmr" typeface="MoolBoran"/>
+        <a:font script="Knda" typeface="Tunga"/>
+        <a:font script="Guru" typeface="Raavi"/>
+        <a:font script="Cans" typeface="Euphemia"/>
+        <a:font script="Cher" typeface="Plantagenet Cherokee"/>
+        <a:font script="Yiii" typeface="Microsoft Yi Baiti"/>
+        <a:font script="Tibt" typeface="Microsoft Himalaya"/>
+        <a:font script="Thaa" typeface="MV Boli"/>
+        <a:font script="Deva" typeface="Mangal"/>
+        <a:font script="Telu" typeface="Gautami"/>
+        <a:font script="Taml" typeface="Latha"/>
+        <a:font script="Syrc" typeface="Estrangelo Edessa"/>
+        <a:font script="Orya" typeface="Kalinga"/>
+        <a:font script="Mlym" typeface="Kartika"/>
+        <a:font script="Laoo" typeface="DokChampa"/>
+        <a:font script="Sinh" typeface="Iskoola Pota"/>
+        <a:font script="Mong" typeface="Mongolian Baiti"/>
+        <a:font script="Viet" typeface="Times New Roman"/>
+        <a:font script="Uigh" typeface="Microsoft Uighur"/>
+        <a:font script="Geor" typeface="Sylfaen"/>
+        <a:font script="Armn" typeface="Arial"/>
+        <a:font script="Bugi" typeface="Leelawadee UI"/>
+        <a:font script="Bopo" typeface="Microsoft JhengHei"/>
+        <a:font script="Java" typeface="Javanese Text"/>
+        <a:font script="Lisu" typeface="Segoe UI"/>
+        <a:font script="Mymr" typeface="Myanmar Text"/>
+        <a:font script="Nkoo" typeface="Ebrima"/>
+        <a:font script="Olck" typeface="Nirmala UI"/>
+        <a:font script="Osma" typeface="Ebrima"/>
+        <a:font script="Phag" typeface="Phagspa"/>
+        <a:font script="Syrn" typeface="Estrangelo Edessa"/>
+        <a:font script="Syrj" typeface="Estrangelo Edessa"/>
+        <a:font script="Syre" typeface="Estrangelo Edessa"/>
+        <a:font script="Sora" typeface="Nirmala UI"/>
+        <a:font script="Tale" typeface="Microsoft Tai Le"/>
+        <a:font script="Talu" typeface="Microsoft New Tai Lue"/>
+        <a:font script="Tfng" typeface="Ebrima"/>
+      </a:majorFont>
+      <a:minorFont>
+        <a:latin typeface="Calibri" panose="020F0502020204030204"/>
+        <a:ea typeface=""/>
+        <a:cs typeface=""/>
+        <a:font script="Jpan" typeface="游ゴシック"/>
+        <a:font script="Hang" typeface="맑은 고딕"/>
+        <a:font script="Hans" typeface="等线"/>
+        <a:font script="Hant" typeface="新細明體"/>
+        <a:font script="Arab" typeface="Arial"/>
+        <a:font script="Hebr" typeface="Arial"/>
+        <a:font script="Thai" typeface="Cordia New"/>
+        <a:font script="Ethi" typeface="Nyala"/>
+        <a:font script="Beng" typeface="Vrinda"/>
+        <a:font script="Gujr" typeface="Shruti"/>
+        <a:font script="Khmr" typeface="DaunPenh"/>
+        <a:font script="Knda" typeface="Tunga"/>
+        <a:font script="Guru" typeface="Raavi"/>
+        <a:font script="Cans" typeface="Euphemia"/>
+        <a:font script="Cher" typeface="Plantagenet Cherokee"/>
+        <a:font script="Yiii" typeface="Microsoft Yi Baiti"/>
+        <a:font script="Tibt" typeface="Microsoft Himalaya"/>
+        <a:font script="Thaa" typeface="MV Boli"/>
+        <a:font script="Deva" typeface="Mangal"/>
+        <a:font script="Telu" typeface="Gautami"/>
+        <a:font script="Taml" typeface="Latha"/>
+        <a:font script="Syrc" typeface="Estrangelo Edessa"/>
+        <a:font script="Orya" typeface="Kalinga"/>
+        <a:font script="Mlym" typeface="Kartika"/>
+        <a:font script="Laoo" typeface="DokChampa"/>
+        <a:font script="Sinh" typeface="Iskoola Pota"/>
+        <a:font script="Mong" typeface="Mongolian Baiti"/>
+        <a:font script="Viet" typeface="Arial"/>
+        <a:font script="Uigh" typeface="Microsoft Uighur"/>
+        <a:font script="Geor" typeface="Sylfaen"/>
+        <a:font script="Armn" typeface="Arial"/>
+        <a:font script="Bugi" typeface="Leelawadee UI"/>
+        <a:font script="Bopo" typeface="Microsoft JhengHei"/>
+        <a:font script="Java" typeface="Javanese Text"/>
+        <a:font script="Lisu" typeface="Segoe UI"/>
+        <a:font script="Mymr" typeface="Myanmar Text"/>
+        <a:font script="Nkoo" typeface="Ebrima"/>
+        <a:font script="Olck" typeface="Nirmala UI"/>
+        <a:font script="Osma" typeface="Ebrima"/>
+        <a:font script="Phag" typeface="Phagspa"/>
+        <a:font script="Syrn" typeface="Estrangelo Edessa"/>
+        <a:font script="Syrj" typeface="Estrangelo Edessa"/>
+        <a:font script="Syre" typeface="Estrangelo Edessa"/>
+        <a:font script="Sora" typeface="Nirmala UI"/>
+        <a:font script="Tale" typeface="Microsoft Tai Le"/>
+        <a:font script="Talu" typeface="Microsoft New Tai Lue"/>
+        <a:font script="Tfng" typeface="Ebrima"/>
+      </a:minorFont>
+    </a:fontScheme>
+    <a:fmtScheme name="Стандартная">
+      <a:fillStyleLst>
+        <a:solidFill>
+          <a:schemeClr val="phClr"/>
+        </a:solidFill>
+        <a:gradFill rotWithShape="1">
+          <a:gsLst>
+            <a:gs pos="0">
+              <a:schemeClr val="phClr">
+                <a:lumMod val="110000"/>
+                <a:satMod val="105000"/>
+                <a:tint val="67000"/>
+              </a:schemeClr>
+            </a:gs>
+            <a:gs pos="50000">
+              <a:schemeClr val="phClr">
+                <a:lumMod val="105000"/>
+                <a:satMod val="103000"/>
+                <a:tint val="73000"/>
+              </a:schemeClr>
+            </a:gs>
+            <a:gs pos="100000">
+              <a:schemeClr val="phClr">
+                <a:lumMod val="105000"/>
+                <a:satMod val="109000"/>
+                <a:tint val="81000"/>
+              </a:schemeClr>
+            </a:gs>
+          </a:gsLst>
+          <a:lin ang="5400000" scaled="0"/>
+        </a:gradFill>
+        <a:gradFill rotWithShape="1">
+          <a:gsLst>
+            <a:gs pos="0">
+              <a:schemeClr val="phClr">
+                <a:satMod val="103000"/>
+                <a:lumMod val="102000"/>
+                <a:tint val="94000"/>
+              </a:schemeClr>
+            </a:gs>
+            <a:gs pos="50000">
+              <a:schemeClr val="phClr">
+                <a:satMod val="110000"/>
+                <a:lumMod val="100000"/>
+                <a:shade val="100000"/>
+              </a:schemeClr>
+            </a:gs>
+            <a:gs pos="100000">
+              <a:schemeClr val="phClr">
+                <a:lumMod val="99000"/>
+                <a:satMod val="120000"/>
+                <a:shade val="78000"/>
+              </a:schemeClr>
+            </a:gs>
+          </a:gsLst>
+          <a:lin ang="5400000" scaled="0"/>
+        </a:gradFill>
+      </a:fillStyleLst>
+      <a:lnStyleLst>
+        <a:ln w="6350" cap="flat" cmpd="sng" algn="ctr">
+          <a:solidFill>
+            <a:schemeClr val="phClr"/>
+          </a:solidFill>
+          <a:prstDash val="solid"/>
+          <a:miter lim="800000"/>
+        </a:ln>
+        <a:ln w="12700" cap="flat" cmpd="sng" algn="ctr">
+          <a:solidFill>
+            <a:schemeClr val="phClr"/>
+          </a:solidFill>
+          <a:prstDash val="solid"/>
+          <a:miter lim="800000"/>
+        </a:ln>
+        <a:ln w="19050" cap="flat" cmpd="sng" algn="ctr">
+          <a:solidFill>
+            <a:schemeClr val="phClr"/>
+          </a:solidFill>
+          <a:prstDash val="solid"/>
+          <a:miter lim="800000"/>
+        </a:ln>
+      </a:lnStyleLst>
+      <a:effectStyleLst>
+        <a:effectStyle>
+          <a:effectLst/>
+        </a:effectStyle>
+        <a:effectStyle>
+          <a:effectLst/>
+        </a:effectStyle>
+        <a:effectStyle>
+          <a:effectLst>
+            <a:outerShdw blurRad="57150" dist="19050" dir="5400000" algn="ctr" rotWithShape="0">
+              <a:srgbClr val="000000">
+                <a:alpha val="63000"/>
+              </a:srgbClr>
+            </a:outerShdw>
+          </a:effectLst>
+        </a:effectStyle>
+      </a:effectStyleLst>
+      <a:bgFillStyleLst>
+        <a:solidFill>
+          <a:schemeClr val="phClr"/>
+        </a:solidFill>
+        <a:solidFill>
+          <a:schemeClr val="phClr">
+            <a:tint val="95000"/>
+            <a:satMod val="170000"/>
+          </a:schemeClr>
+        </a:solidFill>
+        <a:gradFill rotWithShape="1">
+          <a:gsLst>
+            <a:gs pos="0">
+              <a:schemeClr val="phClr">
+                <a:tint val="93000"/>
+                <a:satMod val="150000"/>
+                <a:shade val="98000"/>
+                <a:lumMod val="102000"/>
+              </a:schemeClr>
+            </a:gs>
+            <a:gs pos="50000">
+              <a:schemeClr val="phClr">
+                <a:tint val="98000"/>
+                <a:satMod val="130000"/>
+                <a:shade val="90000"/>
+                <a:lumMod val="103000"/>
+              </a:schemeClr>
+            </a:gs>
+            <a:gs pos="100000">
+              <a:schemeClr val="phClr">
+                <a:shade val="63000"/>
+                <a:satMod val="120000"/>
+              </a:schemeClr>
+            </a:gs>
+          </a:gsLst>
+          <a:lin ang="5400000" scaled="0"/>
+        </a:gradFill>
+      </a:bgFillStyleLst>
+    </a:fmtScheme>
+  </a:themeElements>
+  <a:objectDefaults/>
+  <a:extraClrSchemeLst/>
+  <a:extLst>
+    <a:ext uri="{05A4C25C-085E-4340-85A3-A5531E510DB2}">
+      <thm15:themeFamily xmlns:thm15="http://schemas.microsoft.com/office/thememl/2012/main" name="Office Theme" id="{62F939B6-93AF-4DB8-9C6B-D6C7DFDC589F}" vid="{4A3C46E8-61CC-4603-A589-7422A47A8E4A}"/>
+    </a:ext>
+  </a:extLst>
+</a:theme>
 </file>